--- a/public/lessons/year-6-maths/autumn/week-10/assess-learning-and-plan-next-steps/teaching-powerpoint-v1.pptx
+++ b/public/lessons/year-6-maths/autumn/week-10/assess-learning-and-plan-next-steps/teaching-powerpoint-v1.pptx
@@ -2,24 +2,24 @@
 <file path=ppt/presentation.xml><?xml version="1.0" encoding="utf-8"?>
 <p:presentation xmlns:p="http://schemas.openxmlformats.org/presentationml/2006/main">
   <p:sldMasterIdLst>
-    <p:sldMasterId xmlns:r="http://schemas.openxmlformats.org/officeDocument/2006/relationships" id="2147483648" r:id="R834d6fc7381a4ff0"/>
+    <p:sldMasterId xmlns:r="http://schemas.openxmlformats.org/officeDocument/2006/relationships" id="2147483648" r:id="R2f220c21cf114c89"/>
   </p:sldMasterIdLst>
   <p:notesMasterIdLst>
-    <p:notesMasterId xmlns:r="http://schemas.openxmlformats.org/officeDocument/2006/relationships" r:id="Re131cf2d3df4404d"/>
+    <p:notesMasterId xmlns:r="http://schemas.openxmlformats.org/officeDocument/2006/relationships" r:id="R0b6edf6eb30c451c"/>
   </p:notesMasterIdLst>
   <p:sldIdLst>
-    <p:sldId xmlns:r="http://schemas.openxmlformats.org/officeDocument/2006/relationships" id="256" r:id="R28a2fb0f5d08428f"/>
-    <p:sldId xmlns:r="http://schemas.openxmlformats.org/officeDocument/2006/relationships" id="257" r:id="R79d25de09c64460f"/>
-    <p:sldId xmlns:r="http://schemas.openxmlformats.org/officeDocument/2006/relationships" id="258" r:id="R93569bbddefd477d"/>
-    <p:sldId xmlns:r="http://schemas.openxmlformats.org/officeDocument/2006/relationships" id="259" r:id="R0fad1f0960d34ff8"/>
-    <p:sldId xmlns:r="http://schemas.openxmlformats.org/officeDocument/2006/relationships" id="260" r:id="Rcac1e028f62b47cb"/>
-    <p:sldId xmlns:r="http://schemas.openxmlformats.org/officeDocument/2006/relationships" id="261" r:id="Re4a42acf3f4449dd"/>
-    <p:sldId xmlns:r="http://schemas.openxmlformats.org/officeDocument/2006/relationships" id="262" r:id="R3f6032a730254c9e"/>
-    <p:sldId xmlns:r="http://schemas.openxmlformats.org/officeDocument/2006/relationships" id="263" r:id="R83fdb431b09c46e2"/>
-    <p:sldId xmlns:r="http://schemas.openxmlformats.org/officeDocument/2006/relationships" id="264" r:id="R352cba491a99461b"/>
-    <p:sldId xmlns:r="http://schemas.openxmlformats.org/officeDocument/2006/relationships" id="265" r:id="Rfd36674c4b6f4d91"/>
-    <p:sldId xmlns:r="http://schemas.openxmlformats.org/officeDocument/2006/relationships" id="266" r:id="R0b8f4640c1604272"/>
-    <p:sldId xmlns:r="http://schemas.openxmlformats.org/officeDocument/2006/relationships" id="267" r:id="R3b9da9e433664a16"/>
+    <p:sldId xmlns:r="http://schemas.openxmlformats.org/officeDocument/2006/relationships" id="256" r:id="R0f27ad4acf894f67"/>
+    <p:sldId xmlns:r="http://schemas.openxmlformats.org/officeDocument/2006/relationships" id="257" r:id="Ra5a2eaf7dfaa4ed1"/>
+    <p:sldId xmlns:r="http://schemas.openxmlformats.org/officeDocument/2006/relationships" id="258" r:id="R15c206f336be41a7"/>
+    <p:sldId xmlns:r="http://schemas.openxmlformats.org/officeDocument/2006/relationships" id="259" r:id="R3790cec16fb74ea1"/>
+    <p:sldId xmlns:r="http://schemas.openxmlformats.org/officeDocument/2006/relationships" id="260" r:id="Ref039a56a0804ea1"/>
+    <p:sldId xmlns:r="http://schemas.openxmlformats.org/officeDocument/2006/relationships" id="261" r:id="R9a92ca72893d4478"/>
+    <p:sldId xmlns:r="http://schemas.openxmlformats.org/officeDocument/2006/relationships" id="262" r:id="Rc35c39c513da403d"/>
+    <p:sldId xmlns:r="http://schemas.openxmlformats.org/officeDocument/2006/relationships" id="263" r:id="Ra5e1b0c57c444293"/>
+    <p:sldId xmlns:r="http://schemas.openxmlformats.org/officeDocument/2006/relationships" id="264" r:id="Re519c8cd3fce4328"/>
+    <p:sldId xmlns:r="http://schemas.openxmlformats.org/officeDocument/2006/relationships" id="265" r:id="Ra48e32ae48ee4206"/>
+    <p:sldId xmlns:r="http://schemas.openxmlformats.org/officeDocument/2006/relationships" id="266" r:id="R82707429c0d142c9"/>
+    <p:sldId xmlns:r="http://schemas.openxmlformats.org/officeDocument/2006/relationships" id="267" r:id="R8aa617c471a844b8"/>
   </p:sldIdLst>
   <p:sldSz cx="12192000" cy="6858000"/>
   <p:notesSz cx="6858000" cy="9144000"/>
@@ -873,7 +873,7 @@
           <a:lstStyle xmlns:a="http://schemas.openxmlformats.org/drawingml/2006/main"/>
           <a:p xmlns:a="http://schemas.openxmlformats.org/drawingml/2006/main">
             <a:r>
-              <a:t>I do. Reveal the question, setup and each calculation stage one click at a time. Pupils watch before copying. Model answer: 7,300,000; 91,466; 288.</a:t>
+              <a:t>I do. Reveal the question, then reveal each mathematical change one click at a time. Point to the numbers and operation that changed before moving to the next line. Final answer: 7,300,000; 91,466; 288.</a:t>
             </a:r>
           </a:p>
         </p:txBody>
@@ -1291,7 +1291,7 @@
   </p:cSld>
   <p:clrMap bg1="lt1" tx1="dk1" bg2="lt2" tx2="dk2" accent1="accent1" accent2="accent2" accent3="accent3" accent4="accent4" accent5="accent5" accent6="accent6" hlink="hlink" folHlink="folHlink"/>
   <p:sldLayoutIdLst>
-    <p:sldLayoutId xmlns:r="http://schemas.openxmlformats.org/officeDocument/2006/relationships" id="2147483649" r:id="Re93c68af6b674505"/>
+    <p:sldLayoutId xmlns:r="http://schemas.openxmlformats.org/officeDocument/2006/relationships" id="2147483649" r:id="R60251819014f411c"/>
   </p:sldLayoutIdLst>
   <p:txStyles>
     <p:titleStyle>
@@ -1842,7 +1842,7 @@
           <p:cNvPr id="12" name="">
             <a:extLst xmlns:a="http://schemas.openxmlformats.org/drawingml/2006/main">
               <a:ext uri="{FF2B5EF4-FFF2-40B4-BE49-F238E27FC236}">
-                <a16:creationId xmlns:a16="http://schemas.microsoft.com/office/drawing/2014/main" id="{59BA7E60-CB4C-4CC0-9CA4-E74FD9D91326}"/>
+                <a16:creationId xmlns:a16="http://schemas.microsoft.com/office/drawing/2014/main" id="{7C421645-250A-4CFB-94CF-1E5893329999}"/>
               </a:ext>
             </a:extLst>
           </p:cNvPr>
@@ -1874,7 +1874,7 @@
           <p:cNvPr id="2" name="">
             <a:extLst xmlns:a="http://schemas.openxmlformats.org/drawingml/2006/main">
               <a:ext uri="{FF2B5EF4-FFF2-40B4-BE49-F238E27FC236}">
-                <a16:creationId xmlns:a16="http://schemas.microsoft.com/office/drawing/2014/main" id="{B6D9BE6D-E158-4BF4-8B45-E3D1565AB7E6}"/>
+                <a16:creationId xmlns:a16="http://schemas.microsoft.com/office/drawing/2014/main" id="{15B2056E-316C-40C0-9CF5-7D008D16AEBC}"/>
               </a:ext>
             </a:extLst>
           </p:cNvPr>
@@ -1931,7 +1931,7 @@
           <p:cNvPr id="3" name="">
             <a:extLst xmlns:a="http://schemas.openxmlformats.org/drawingml/2006/main">
               <a:ext uri="{FF2B5EF4-FFF2-40B4-BE49-F238E27FC236}">
-                <a16:creationId xmlns:a16="http://schemas.microsoft.com/office/drawing/2014/main" id="{02E5AB75-A28C-4A92-AA64-8C7F7D95D7AD}"/>
+                <a16:creationId xmlns:a16="http://schemas.microsoft.com/office/drawing/2014/main" id="{2BFA13B9-9D09-4B92-8DFE-96ECF1729920}"/>
               </a:ext>
             </a:extLst>
           </p:cNvPr>
@@ -1965,7 +1965,7 @@
           <p:cNvPr id="4" name="">
             <a:extLst xmlns:a="http://schemas.openxmlformats.org/drawingml/2006/main">
               <a:ext uri="{FF2B5EF4-FFF2-40B4-BE49-F238E27FC236}">
-                <a16:creationId xmlns:a16="http://schemas.microsoft.com/office/drawing/2014/main" id="{AA68AB8D-4B5D-4D01-B022-51D6E70CB9AD}"/>
+                <a16:creationId xmlns:a16="http://schemas.microsoft.com/office/drawing/2014/main" id="{F1CF302F-C188-4E2E-8E6E-351B9B4BFAA4}"/>
               </a:ext>
             </a:extLst>
           </p:cNvPr>
@@ -2022,7 +2022,7 @@
           <p:cNvPr id="5" name="">
             <a:extLst xmlns:a="http://schemas.openxmlformats.org/drawingml/2006/main">
               <a:ext uri="{FF2B5EF4-FFF2-40B4-BE49-F238E27FC236}">
-                <a16:creationId xmlns:a16="http://schemas.microsoft.com/office/drawing/2014/main" id="{2CB9E9DC-238C-48C7-87AA-75F17391711E}"/>
+                <a16:creationId xmlns:a16="http://schemas.microsoft.com/office/drawing/2014/main" id="{70903EFE-5180-4270-8174-55B7B9D4DB76}"/>
               </a:ext>
             </a:extLst>
           </p:cNvPr>
@@ -2079,7 +2079,7 @@
           <p:cNvPr id="6" name="">
             <a:extLst xmlns:a="http://schemas.openxmlformats.org/drawingml/2006/main">
               <a:ext uri="{FF2B5EF4-FFF2-40B4-BE49-F238E27FC236}">
-                <a16:creationId xmlns:a16="http://schemas.microsoft.com/office/drawing/2014/main" id="{9477CB89-37A6-45D9-9A1B-E572B8C1F0E1}"/>
+                <a16:creationId xmlns:a16="http://schemas.microsoft.com/office/drawing/2014/main" id="{DC21C694-F4DC-409A-88EB-C555B72A3E6A}"/>
               </a:ext>
             </a:extLst>
           </p:cNvPr>
@@ -2113,7 +2113,7 @@
           <p:cNvPr id="7" name="">
             <a:extLst xmlns:a="http://schemas.openxmlformats.org/drawingml/2006/main">
               <a:ext uri="{FF2B5EF4-FFF2-40B4-BE49-F238E27FC236}">
-                <a16:creationId xmlns:a16="http://schemas.microsoft.com/office/drawing/2014/main" id="{EC466335-FDC8-4E1D-A532-6DF816A89E80}"/>
+                <a16:creationId xmlns:a16="http://schemas.microsoft.com/office/drawing/2014/main" id="{6B026932-B85F-42C9-A082-3E4467609542}"/>
               </a:ext>
             </a:extLst>
           </p:cNvPr>
@@ -2170,7 +2170,7 @@
           <p:cNvPr id="8" name="">
             <a:extLst xmlns:a="http://schemas.openxmlformats.org/drawingml/2006/main">
               <a:ext uri="{FF2B5EF4-FFF2-40B4-BE49-F238E27FC236}">
-                <a16:creationId xmlns:a16="http://schemas.microsoft.com/office/drawing/2014/main" id="{1A8A132A-8572-4934-932A-4893E29FEBA1}"/>
+                <a16:creationId xmlns:a16="http://schemas.microsoft.com/office/drawing/2014/main" id="{58AC5160-A1AA-43E9-886A-39B9E61BA7B6}"/>
               </a:ext>
             </a:extLst>
           </p:cNvPr>
@@ -2227,7 +2227,7 @@
           <p:cNvPr id="9" name="">
             <a:extLst xmlns:a="http://schemas.openxmlformats.org/drawingml/2006/main">
               <a:ext uri="{FF2B5EF4-FFF2-40B4-BE49-F238E27FC236}">
-                <a16:creationId xmlns:a16="http://schemas.microsoft.com/office/drawing/2014/main" id="{A6AA32C5-567C-44AC-9D42-4201AA2D1A74}"/>
+                <a16:creationId xmlns:a16="http://schemas.microsoft.com/office/drawing/2014/main" id="{47D59756-E1E5-47F1-8149-21F3F85CB4F8}"/>
               </a:ext>
             </a:extLst>
           </p:cNvPr>
@@ -2284,7 +2284,7 @@
           <p:cNvPr id="10" name="">
             <a:extLst xmlns:a="http://schemas.openxmlformats.org/drawingml/2006/main">
               <a:ext uri="{FF2B5EF4-FFF2-40B4-BE49-F238E27FC236}">
-                <a16:creationId xmlns:a16="http://schemas.microsoft.com/office/drawing/2014/main" id="{0B84D4B3-8D81-4E55-B465-1F693A0102E7}"/>
+                <a16:creationId xmlns:a16="http://schemas.microsoft.com/office/drawing/2014/main" id="{9BDED903-A92F-4274-82A7-7B2EA4C0E0B6}"/>
               </a:ext>
             </a:extLst>
           </p:cNvPr>
@@ -2341,7 +2341,7 @@
           <p:cNvPr id="11" name="">
             <a:extLst xmlns:a="http://schemas.openxmlformats.org/drawingml/2006/main">
               <a:ext uri="{FF2B5EF4-FFF2-40B4-BE49-F238E27FC236}">
-                <a16:creationId xmlns:a16="http://schemas.microsoft.com/office/drawing/2014/main" id="{07E5C68F-DA1A-4D5B-9407-8599A4B7844B}"/>
+                <a16:creationId xmlns:a16="http://schemas.microsoft.com/office/drawing/2014/main" id="{B11F5257-0EC6-433A-84DB-8B12E0161C07}"/>
               </a:ext>
             </a:extLst>
           </p:cNvPr>
@@ -2396,7 +2396,7 @@
     </p:spTree>
     <p:extLst>
       <p:ext uri="{BB962C8B-B14F-4D97-AF65-F5344CB8AC3E}">
-        <p14:creationId xmlns:p14="http://schemas.microsoft.com/office/powerpoint/2010/main" val="1336539909"/>
+        <p14:creationId xmlns:p14="http://schemas.microsoft.com/office/powerpoint/2010/main" val="1765074162"/>
       </p:ext>
     </p:extLst>
   </p:cSld>
@@ -2427,7 +2427,7 @@
           <p:cNvPr id="14" name="">
             <a:extLst xmlns:a="http://schemas.openxmlformats.org/drawingml/2006/main">
               <a:ext uri="{FF2B5EF4-FFF2-40B4-BE49-F238E27FC236}">
-                <a16:creationId xmlns:a16="http://schemas.microsoft.com/office/drawing/2014/main" id="{A477713C-8A11-42EA-9693-5462B56D847F}"/>
+                <a16:creationId xmlns:a16="http://schemas.microsoft.com/office/drawing/2014/main" id="{CA243DB7-AC9A-4FE3-B800-97E9A9C72E51}"/>
               </a:ext>
             </a:extLst>
           </p:cNvPr>
@@ -2459,7 +2459,7 @@
           <p:cNvPr id="2" name="">
             <a:extLst xmlns:a="http://schemas.openxmlformats.org/drawingml/2006/main">
               <a:ext uri="{FF2B5EF4-FFF2-40B4-BE49-F238E27FC236}">
-                <a16:creationId xmlns:a16="http://schemas.microsoft.com/office/drawing/2014/main" id="{9605F0A2-8B6A-49FC-B076-2BC0E3A99B6D}"/>
+                <a16:creationId xmlns:a16="http://schemas.microsoft.com/office/drawing/2014/main" id="{E0D7B23E-0F63-40B8-B6EE-0D1DBE44D78A}"/>
               </a:ext>
             </a:extLst>
           </p:cNvPr>
@@ -2516,7 +2516,7 @@
           <p:cNvPr id="3" name="">
             <a:extLst xmlns:a="http://schemas.openxmlformats.org/drawingml/2006/main">
               <a:ext uri="{FF2B5EF4-FFF2-40B4-BE49-F238E27FC236}">
-                <a16:creationId xmlns:a16="http://schemas.microsoft.com/office/drawing/2014/main" id="{613FE69F-C86A-4169-88A7-5A818E5017CA}"/>
+                <a16:creationId xmlns:a16="http://schemas.microsoft.com/office/drawing/2014/main" id="{38E013F7-A589-4E8B-90FA-885C5EC67B83}"/>
               </a:ext>
             </a:extLst>
           </p:cNvPr>
@@ -2548,7 +2548,7 @@
           <p:cNvPr id="4" name="">
             <a:extLst xmlns:a="http://schemas.openxmlformats.org/drawingml/2006/main">
               <a:ext uri="{FF2B5EF4-FFF2-40B4-BE49-F238E27FC236}">
-                <a16:creationId xmlns:a16="http://schemas.microsoft.com/office/drawing/2014/main" id="{9A6A8D5D-8DAD-4114-B8A4-76D29200975C}"/>
+                <a16:creationId xmlns:a16="http://schemas.microsoft.com/office/drawing/2014/main" id="{53B0AA45-B09C-4A17-8994-8D17889D65DF}"/>
               </a:ext>
             </a:extLst>
           </p:cNvPr>
@@ -2605,7 +2605,7 @@
           <p:cNvPr id="5" name="">
             <a:extLst xmlns:a="http://schemas.openxmlformats.org/drawingml/2006/main">
               <a:ext uri="{FF2B5EF4-FFF2-40B4-BE49-F238E27FC236}">
-                <a16:creationId xmlns:a16="http://schemas.microsoft.com/office/drawing/2014/main" id="{8444A9B9-F83A-4810-AEB0-36CE77182F6A}"/>
+                <a16:creationId xmlns:a16="http://schemas.microsoft.com/office/drawing/2014/main" id="{C0697F72-499F-4E4E-B142-4E93128F2383}"/>
               </a:ext>
             </a:extLst>
           </p:cNvPr>
@@ -2662,7 +2662,7 @@
           <p:cNvPr id="6" name="">
             <a:extLst xmlns:a="http://schemas.openxmlformats.org/drawingml/2006/main">
               <a:ext uri="{FF2B5EF4-FFF2-40B4-BE49-F238E27FC236}">
-                <a16:creationId xmlns:a16="http://schemas.microsoft.com/office/drawing/2014/main" id="{B0CEF453-E079-416F-8ACD-21E61B60CADF}"/>
+                <a16:creationId xmlns:a16="http://schemas.microsoft.com/office/drawing/2014/main" id="{9FBDC676-F286-46F9-9DA8-69C39E0596BD}"/>
               </a:ext>
             </a:extLst>
           </p:cNvPr>
@@ -2719,7 +2719,7 @@
           <p:cNvPr id="7" name="">
             <a:extLst xmlns:a="http://schemas.openxmlformats.org/drawingml/2006/main">
               <a:ext uri="{FF2B5EF4-FFF2-40B4-BE49-F238E27FC236}">
-                <a16:creationId xmlns:a16="http://schemas.microsoft.com/office/drawing/2014/main" id="{5D1E527F-DD95-4D4B-8064-ABF1A7865B0B}"/>
+                <a16:creationId xmlns:a16="http://schemas.microsoft.com/office/drawing/2014/main" id="{370F84E4-C1D3-46CE-A59C-CB24250C5417}"/>
               </a:ext>
             </a:extLst>
           </p:cNvPr>
@@ -2751,7 +2751,7 @@
           <p:cNvPr id="8" name="">
             <a:extLst xmlns:a="http://schemas.openxmlformats.org/drawingml/2006/main">
               <a:ext uri="{FF2B5EF4-FFF2-40B4-BE49-F238E27FC236}">
-                <a16:creationId xmlns:a16="http://schemas.microsoft.com/office/drawing/2014/main" id="{43439927-01B5-45A9-9B53-7027E64F68EF}"/>
+                <a16:creationId xmlns:a16="http://schemas.microsoft.com/office/drawing/2014/main" id="{C278C50C-2A73-4CB7-8960-84007282BE85}"/>
               </a:ext>
             </a:extLst>
           </p:cNvPr>
@@ -2808,7 +2808,7 @@
           <p:cNvPr id="9" name="">
             <a:extLst xmlns:a="http://schemas.openxmlformats.org/drawingml/2006/main">
               <a:ext uri="{FF2B5EF4-FFF2-40B4-BE49-F238E27FC236}">
-                <a16:creationId xmlns:a16="http://schemas.microsoft.com/office/drawing/2014/main" id="{3429312A-9EA4-4B0D-AD8F-59099365EC4F}"/>
+                <a16:creationId xmlns:a16="http://schemas.microsoft.com/office/drawing/2014/main" id="{896BFDFF-7918-4FE4-AA4E-7BC0226697D7}"/>
               </a:ext>
             </a:extLst>
           </p:cNvPr>
@@ -2865,7 +2865,7 @@
           <p:cNvPr id="10" name="">
             <a:extLst xmlns:a="http://schemas.openxmlformats.org/drawingml/2006/main">
               <a:ext uri="{FF2B5EF4-FFF2-40B4-BE49-F238E27FC236}">
-                <a16:creationId xmlns:a16="http://schemas.microsoft.com/office/drawing/2014/main" id="{F8A7BC67-E724-4898-AB79-0F86E130945A}"/>
+                <a16:creationId xmlns:a16="http://schemas.microsoft.com/office/drawing/2014/main" id="{4DEC1A06-A185-48A2-8440-5E3D7F73F275}"/>
               </a:ext>
             </a:extLst>
           </p:cNvPr>
@@ -2922,7 +2922,7 @@
           <p:cNvPr id="11" name="">
             <a:extLst xmlns:a="http://schemas.openxmlformats.org/drawingml/2006/main">
               <a:ext uri="{FF2B5EF4-FFF2-40B4-BE49-F238E27FC236}">
-                <a16:creationId xmlns:a16="http://schemas.microsoft.com/office/drawing/2014/main" id="{AC95C8C5-2F04-4165-BCD3-7B87E50ABBAF}"/>
+                <a16:creationId xmlns:a16="http://schemas.microsoft.com/office/drawing/2014/main" id="{0EF60709-7177-4F23-9DBA-E8727384CD23}"/>
               </a:ext>
             </a:extLst>
           </p:cNvPr>
@@ -2979,7 +2979,7 @@
           <p:cNvPr id="12" name="">
             <a:extLst xmlns:a="http://schemas.openxmlformats.org/drawingml/2006/main">
               <a:ext uri="{FF2B5EF4-FFF2-40B4-BE49-F238E27FC236}">
-                <a16:creationId xmlns:a16="http://schemas.microsoft.com/office/drawing/2014/main" id="{681869DF-2304-4209-8428-04234CEA859A}"/>
+                <a16:creationId xmlns:a16="http://schemas.microsoft.com/office/drawing/2014/main" id="{3B21067B-6D93-4525-A004-17454805FBE9}"/>
               </a:ext>
             </a:extLst>
           </p:cNvPr>
@@ -3036,7 +3036,7 @@
           <p:cNvPr id="13" name="">
             <a:extLst xmlns:a="http://schemas.openxmlformats.org/drawingml/2006/main">
               <a:ext uri="{FF2B5EF4-FFF2-40B4-BE49-F238E27FC236}">
-                <a16:creationId xmlns:a16="http://schemas.microsoft.com/office/drawing/2014/main" id="{6BFF675F-ACEF-4BE8-8CFB-F5811C725BDC}"/>
+                <a16:creationId xmlns:a16="http://schemas.microsoft.com/office/drawing/2014/main" id="{DE8362F6-BFC3-49FF-A788-EB0914EB163D}"/>
               </a:ext>
             </a:extLst>
           </p:cNvPr>
@@ -3091,7 +3091,7 @@
     </p:spTree>
     <p:extLst>
       <p:ext uri="{BB962C8B-B14F-4D97-AF65-F5344CB8AC3E}">
-        <p14:creationId xmlns:p14="http://schemas.microsoft.com/office/powerpoint/2010/main" val="2074656399"/>
+        <p14:creationId xmlns:p14="http://schemas.microsoft.com/office/powerpoint/2010/main" val="1921823735"/>
       </p:ext>
     </p:extLst>
   </p:cSld>
@@ -3292,7 +3292,7 @@
           <p:cNvPr id="19" name="">
             <a:extLst xmlns:a="http://schemas.openxmlformats.org/drawingml/2006/main">
               <a:ext uri="{FF2B5EF4-FFF2-40B4-BE49-F238E27FC236}">
-                <a16:creationId xmlns:a16="http://schemas.microsoft.com/office/drawing/2014/main" id="{8C88522E-DF78-4494-A39F-5B4E5824BAC3}"/>
+                <a16:creationId xmlns:a16="http://schemas.microsoft.com/office/drawing/2014/main" id="{521C481E-F3ED-4570-94BC-AAF791AF576A}"/>
               </a:ext>
             </a:extLst>
           </p:cNvPr>
@@ -3324,7 +3324,7 @@
           <p:cNvPr id="2" name="">
             <a:extLst xmlns:a="http://schemas.openxmlformats.org/drawingml/2006/main">
               <a:ext uri="{FF2B5EF4-FFF2-40B4-BE49-F238E27FC236}">
-                <a16:creationId xmlns:a16="http://schemas.microsoft.com/office/drawing/2014/main" id="{4A5BDE43-F321-44A7-9795-3CCC9989601A}"/>
+                <a16:creationId xmlns:a16="http://schemas.microsoft.com/office/drawing/2014/main" id="{618E369E-62EA-4D79-827C-85D8B5F8CC42}"/>
               </a:ext>
             </a:extLst>
           </p:cNvPr>
@@ -3381,7 +3381,7 @@
           <p:cNvPr id="3" name="">
             <a:extLst xmlns:a="http://schemas.openxmlformats.org/drawingml/2006/main">
               <a:ext uri="{FF2B5EF4-FFF2-40B4-BE49-F238E27FC236}">
-                <a16:creationId xmlns:a16="http://schemas.microsoft.com/office/drawing/2014/main" id="{35942C63-CF17-479D-AD16-CE31D4FEB6E1}"/>
+                <a16:creationId xmlns:a16="http://schemas.microsoft.com/office/drawing/2014/main" id="{3C081532-EA56-4217-A34E-3ED73529FA34}"/>
               </a:ext>
             </a:extLst>
           </p:cNvPr>
@@ -3413,7 +3413,7 @@
           <p:cNvPr id="4" name="">
             <a:extLst xmlns:a="http://schemas.openxmlformats.org/drawingml/2006/main">
               <a:ext uri="{FF2B5EF4-FFF2-40B4-BE49-F238E27FC236}">
-                <a16:creationId xmlns:a16="http://schemas.microsoft.com/office/drawing/2014/main" id="{FDC8AB7F-9E62-48F0-A2B8-6B06B2B6E510}"/>
+                <a16:creationId xmlns:a16="http://schemas.microsoft.com/office/drawing/2014/main" id="{CB9ADD32-EA9C-4AFF-8D76-55BE291C1BEB}"/>
               </a:ext>
             </a:extLst>
           </p:cNvPr>
@@ -3470,7 +3470,7 @@
           <p:cNvPr id="5" name="">
             <a:extLst xmlns:a="http://schemas.openxmlformats.org/drawingml/2006/main">
               <a:ext uri="{FF2B5EF4-FFF2-40B4-BE49-F238E27FC236}">
-                <a16:creationId xmlns:a16="http://schemas.microsoft.com/office/drawing/2014/main" id="{0EA65931-44B0-47D0-8380-013563C76B9D}"/>
+                <a16:creationId xmlns:a16="http://schemas.microsoft.com/office/drawing/2014/main" id="{D22BB74A-569E-4457-AE8B-C5E8469D99FC}"/>
               </a:ext>
             </a:extLst>
           </p:cNvPr>
@@ -3527,7 +3527,7 @@
           <p:cNvPr id="6" name="">
             <a:extLst xmlns:a="http://schemas.openxmlformats.org/drawingml/2006/main">
               <a:ext uri="{FF2B5EF4-FFF2-40B4-BE49-F238E27FC236}">
-                <a16:creationId xmlns:a16="http://schemas.microsoft.com/office/drawing/2014/main" id="{84F10DA1-73EC-4FF2-87F8-C53108E4D5FF}"/>
+                <a16:creationId xmlns:a16="http://schemas.microsoft.com/office/drawing/2014/main" id="{E9E15816-C248-476F-B751-BC7EB0D55968}"/>
               </a:ext>
             </a:extLst>
           </p:cNvPr>
@@ -3584,7 +3584,7 @@
           <p:cNvPr id="7" name="">
             <a:extLst xmlns:a="http://schemas.openxmlformats.org/drawingml/2006/main">
               <a:ext uri="{FF2B5EF4-FFF2-40B4-BE49-F238E27FC236}">
-                <a16:creationId xmlns:a16="http://schemas.microsoft.com/office/drawing/2014/main" id="{F0DC5AB7-EDAF-4BFD-9A21-94621F1066BF}"/>
+                <a16:creationId xmlns:a16="http://schemas.microsoft.com/office/drawing/2014/main" id="{0105DFFA-3D5E-4924-8729-AC11E01EF7F3}"/>
               </a:ext>
             </a:extLst>
           </p:cNvPr>
@@ -3616,7 +3616,7 @@
           <p:cNvPr id="8" name="">
             <a:extLst xmlns:a="http://schemas.openxmlformats.org/drawingml/2006/main">
               <a:ext uri="{FF2B5EF4-FFF2-40B4-BE49-F238E27FC236}">
-                <a16:creationId xmlns:a16="http://schemas.microsoft.com/office/drawing/2014/main" id="{51F250AF-D3DA-49F3-9CFE-1155B487AADB}"/>
+                <a16:creationId xmlns:a16="http://schemas.microsoft.com/office/drawing/2014/main" id="{9429088A-15BE-482E-9AF2-CB7E4D8E3282}"/>
               </a:ext>
             </a:extLst>
           </p:cNvPr>
@@ -3673,7 +3673,7 @@
           <p:cNvPr id="9" name="">
             <a:extLst xmlns:a="http://schemas.openxmlformats.org/drawingml/2006/main">
               <a:ext uri="{FF2B5EF4-FFF2-40B4-BE49-F238E27FC236}">
-                <a16:creationId xmlns:a16="http://schemas.microsoft.com/office/drawing/2014/main" id="{6B2DE09B-B37B-420D-AEB7-0D4BA7076C68}"/>
+                <a16:creationId xmlns:a16="http://schemas.microsoft.com/office/drawing/2014/main" id="{95DCC09A-C9E6-4176-86ED-73FD15924079}"/>
               </a:ext>
             </a:extLst>
           </p:cNvPr>
@@ -3730,7 +3730,7 @@
           <p:cNvPr id="10" name="">
             <a:extLst xmlns:a="http://schemas.openxmlformats.org/drawingml/2006/main">
               <a:ext uri="{FF2B5EF4-FFF2-40B4-BE49-F238E27FC236}">
-                <a16:creationId xmlns:a16="http://schemas.microsoft.com/office/drawing/2014/main" id="{1ECC3548-3551-4342-AB9A-CABFEDE6F537}"/>
+                <a16:creationId xmlns:a16="http://schemas.microsoft.com/office/drawing/2014/main" id="{776F7B67-152F-4797-AB33-7D69B5F933DC}"/>
               </a:ext>
             </a:extLst>
           </p:cNvPr>
@@ -3787,7 +3787,7 @@
           <p:cNvPr id="11" name="">
             <a:extLst xmlns:a="http://schemas.openxmlformats.org/drawingml/2006/main">
               <a:ext uri="{FF2B5EF4-FFF2-40B4-BE49-F238E27FC236}">
-                <a16:creationId xmlns:a16="http://schemas.microsoft.com/office/drawing/2014/main" id="{05E30B79-EED5-457D-81EC-887AD9FA9062}"/>
+                <a16:creationId xmlns:a16="http://schemas.microsoft.com/office/drawing/2014/main" id="{7B9E5F08-B6ED-49B9-94CB-2786C0274C79}"/>
               </a:ext>
             </a:extLst>
           </p:cNvPr>
@@ -3821,7 +3821,7 @@
           <p:cNvPr id="12" name="">
             <a:extLst xmlns:a="http://schemas.openxmlformats.org/drawingml/2006/main">
               <a:ext uri="{FF2B5EF4-FFF2-40B4-BE49-F238E27FC236}">
-                <a16:creationId xmlns:a16="http://schemas.microsoft.com/office/drawing/2014/main" id="{2E145E3C-BA60-4345-8A9E-7085745A440B}"/>
+                <a16:creationId xmlns:a16="http://schemas.microsoft.com/office/drawing/2014/main" id="{3C708BBF-D10F-4F5A-8F2D-0AC2C239121A}"/>
               </a:ext>
             </a:extLst>
           </p:cNvPr>
@@ -3878,7 +3878,7 @@
           <p:cNvPr id="13" name="">
             <a:extLst xmlns:a="http://schemas.openxmlformats.org/drawingml/2006/main">
               <a:ext uri="{FF2B5EF4-FFF2-40B4-BE49-F238E27FC236}">
-                <a16:creationId xmlns:a16="http://schemas.microsoft.com/office/drawing/2014/main" id="{51E6BA27-1AAF-464E-8FC4-FEB797B72EB2}"/>
+                <a16:creationId xmlns:a16="http://schemas.microsoft.com/office/drawing/2014/main" id="{FBBDC51C-7032-4189-87C2-1210DC00C96A}"/>
               </a:ext>
             </a:extLst>
           </p:cNvPr>
@@ -3935,7 +3935,7 @@
           <p:cNvPr id="14" name="">
             <a:extLst xmlns:a="http://schemas.openxmlformats.org/drawingml/2006/main">
               <a:ext uri="{FF2B5EF4-FFF2-40B4-BE49-F238E27FC236}">
-                <a16:creationId xmlns:a16="http://schemas.microsoft.com/office/drawing/2014/main" id="{1D959519-A90C-4BA8-807E-6DB7E24CAA42}"/>
+                <a16:creationId xmlns:a16="http://schemas.microsoft.com/office/drawing/2014/main" id="{706AA8CD-369E-41D8-AF63-BFFEE0C54C40}"/>
               </a:ext>
             </a:extLst>
           </p:cNvPr>
@@ -3992,7 +3992,7 @@
           <p:cNvPr id="15" name="">
             <a:extLst xmlns:a="http://schemas.openxmlformats.org/drawingml/2006/main">
               <a:ext uri="{FF2B5EF4-FFF2-40B4-BE49-F238E27FC236}">
-                <a16:creationId xmlns:a16="http://schemas.microsoft.com/office/drawing/2014/main" id="{50F4D31D-081F-41F8-A0F4-BA0F49E9630B}"/>
+                <a16:creationId xmlns:a16="http://schemas.microsoft.com/office/drawing/2014/main" id="{9300EFD5-ED6A-4B9A-89C9-31102D9CEE52}"/>
               </a:ext>
             </a:extLst>
           </p:cNvPr>
@@ -4026,7 +4026,7 @@
           <p:cNvPr id="16" name="">
             <a:extLst xmlns:a="http://schemas.openxmlformats.org/drawingml/2006/main">
               <a:ext uri="{FF2B5EF4-FFF2-40B4-BE49-F238E27FC236}">
-                <a16:creationId xmlns:a16="http://schemas.microsoft.com/office/drawing/2014/main" id="{AB756E9F-7C89-43DA-A3DC-B3E5E446752C}"/>
+                <a16:creationId xmlns:a16="http://schemas.microsoft.com/office/drawing/2014/main" id="{526F6ADD-FF76-483E-8F81-0BC5878DF817}"/>
               </a:ext>
             </a:extLst>
           </p:cNvPr>
@@ -4083,7 +4083,7 @@
           <p:cNvPr id="17" name="">
             <a:extLst xmlns:a="http://schemas.openxmlformats.org/drawingml/2006/main">
               <a:ext uri="{FF2B5EF4-FFF2-40B4-BE49-F238E27FC236}">
-                <a16:creationId xmlns:a16="http://schemas.microsoft.com/office/drawing/2014/main" id="{589F025D-00B9-4108-824C-80D4CA5E7DED}"/>
+                <a16:creationId xmlns:a16="http://schemas.microsoft.com/office/drawing/2014/main" id="{AD16F8C6-3532-4F21-B5B9-2C483204922A}"/>
               </a:ext>
             </a:extLst>
           </p:cNvPr>
@@ -4140,7 +4140,7 @@
           <p:cNvPr id="18" name="">
             <a:extLst xmlns:a="http://schemas.openxmlformats.org/drawingml/2006/main">
               <a:ext uri="{FF2B5EF4-FFF2-40B4-BE49-F238E27FC236}">
-                <a16:creationId xmlns:a16="http://schemas.microsoft.com/office/drawing/2014/main" id="{CD3F4A7D-FE3E-4E70-B672-61D1F3DF0FCC}"/>
+                <a16:creationId xmlns:a16="http://schemas.microsoft.com/office/drawing/2014/main" id="{79D2B2D1-25CF-4C5E-8A61-CEA0FED5673D}"/>
               </a:ext>
             </a:extLst>
           </p:cNvPr>
@@ -4195,7 +4195,7 @@
     </p:spTree>
     <p:extLst>
       <p:ext uri="{BB962C8B-B14F-4D97-AF65-F5344CB8AC3E}">
-        <p14:creationId xmlns:p14="http://schemas.microsoft.com/office/powerpoint/2010/main" val="1247671585"/>
+        <p14:creationId xmlns:p14="http://schemas.microsoft.com/office/powerpoint/2010/main" val="714639591"/>
       </p:ext>
     </p:extLst>
   </p:cSld>
@@ -4350,7 +4350,7 @@
           <p:cNvPr id="23" name="">
             <a:extLst xmlns:a="http://schemas.openxmlformats.org/drawingml/2006/main">
               <a:ext uri="{FF2B5EF4-FFF2-40B4-BE49-F238E27FC236}">
-                <a16:creationId xmlns:a16="http://schemas.microsoft.com/office/drawing/2014/main" id="{D969D58F-727F-4FDE-95DB-7EC319CE221A}"/>
+                <a16:creationId xmlns:a16="http://schemas.microsoft.com/office/drawing/2014/main" id="{D603D9B8-2544-4122-BE9A-F7B6B6531C43}"/>
               </a:ext>
             </a:extLst>
           </p:cNvPr>
@@ -4382,7 +4382,7 @@
           <p:cNvPr id="2" name="">
             <a:extLst xmlns:a="http://schemas.openxmlformats.org/drawingml/2006/main">
               <a:ext uri="{FF2B5EF4-FFF2-40B4-BE49-F238E27FC236}">
-                <a16:creationId xmlns:a16="http://schemas.microsoft.com/office/drawing/2014/main" id="{2EDDD9C8-FB08-4238-87DE-5A323AB0AB41}"/>
+                <a16:creationId xmlns:a16="http://schemas.microsoft.com/office/drawing/2014/main" id="{27DF221E-2970-43BD-A642-6720CEB32A56}"/>
               </a:ext>
             </a:extLst>
           </p:cNvPr>
@@ -4439,7 +4439,7 @@
           <p:cNvPr id="3" name="">
             <a:extLst xmlns:a="http://schemas.openxmlformats.org/drawingml/2006/main">
               <a:ext uri="{FF2B5EF4-FFF2-40B4-BE49-F238E27FC236}">
-                <a16:creationId xmlns:a16="http://schemas.microsoft.com/office/drawing/2014/main" id="{E2C89A78-9AD8-4CC9-A087-9BBDEC4D5B33}"/>
+                <a16:creationId xmlns:a16="http://schemas.microsoft.com/office/drawing/2014/main" id="{C722C097-E463-43D4-B239-CB21284C89ED}"/>
               </a:ext>
             </a:extLst>
           </p:cNvPr>
@@ -4471,7 +4471,7 @@
           <p:cNvPr id="4" name="">
             <a:extLst xmlns:a="http://schemas.openxmlformats.org/drawingml/2006/main">
               <a:ext uri="{FF2B5EF4-FFF2-40B4-BE49-F238E27FC236}">
-                <a16:creationId xmlns:a16="http://schemas.microsoft.com/office/drawing/2014/main" id="{5B107B6A-F719-4C5E-B94A-EF03A03BC32B}"/>
+                <a16:creationId xmlns:a16="http://schemas.microsoft.com/office/drawing/2014/main" id="{E2CD8986-E4F8-496E-8059-5BD1AA7B35FD}"/>
               </a:ext>
             </a:extLst>
           </p:cNvPr>
@@ -4528,7 +4528,7 @@
           <p:cNvPr id="5" name="">
             <a:extLst xmlns:a="http://schemas.openxmlformats.org/drawingml/2006/main">
               <a:ext uri="{FF2B5EF4-FFF2-40B4-BE49-F238E27FC236}">
-                <a16:creationId xmlns:a16="http://schemas.microsoft.com/office/drawing/2014/main" id="{764C6881-3C4B-4405-963C-D19FBBD96981}"/>
+                <a16:creationId xmlns:a16="http://schemas.microsoft.com/office/drawing/2014/main" id="{2E8F40FC-6C63-48BF-8364-34E20280727F}"/>
               </a:ext>
             </a:extLst>
           </p:cNvPr>
@@ -4585,7 +4585,7 @@
           <p:cNvPr id="6" name="">
             <a:extLst xmlns:a="http://schemas.openxmlformats.org/drawingml/2006/main">
               <a:ext uri="{FF2B5EF4-FFF2-40B4-BE49-F238E27FC236}">
-                <a16:creationId xmlns:a16="http://schemas.microsoft.com/office/drawing/2014/main" id="{FAB8CAFE-B7CD-42A6-BAB3-F3875EE3B475}"/>
+                <a16:creationId xmlns:a16="http://schemas.microsoft.com/office/drawing/2014/main" id="{8F8AF0C7-E0EB-44CB-A5CC-BD467CE5B364}"/>
               </a:ext>
             </a:extLst>
           </p:cNvPr>
@@ -4642,7 +4642,7 @@
           <p:cNvPr id="7" name="">
             <a:extLst xmlns:a="http://schemas.openxmlformats.org/drawingml/2006/main">
               <a:ext uri="{FF2B5EF4-FFF2-40B4-BE49-F238E27FC236}">
-                <a16:creationId xmlns:a16="http://schemas.microsoft.com/office/drawing/2014/main" id="{13F28BC7-2858-4497-87BD-90D20D9071B0}"/>
+                <a16:creationId xmlns:a16="http://schemas.microsoft.com/office/drawing/2014/main" id="{24BA36EC-8388-4918-BEF7-0B5C6FC1563A}"/>
               </a:ext>
             </a:extLst>
           </p:cNvPr>
@@ -4674,7 +4674,7 @@
           <p:cNvPr id="8" name="">
             <a:extLst xmlns:a="http://schemas.openxmlformats.org/drawingml/2006/main">
               <a:ext uri="{FF2B5EF4-FFF2-40B4-BE49-F238E27FC236}">
-                <a16:creationId xmlns:a16="http://schemas.microsoft.com/office/drawing/2014/main" id="{0C8CB48E-7DAC-4560-B7E4-6AB40D09A686}"/>
+                <a16:creationId xmlns:a16="http://schemas.microsoft.com/office/drawing/2014/main" id="{A0E1CE5F-2D03-4B1C-AF18-C5C7237C6C44}"/>
               </a:ext>
             </a:extLst>
           </p:cNvPr>
@@ -4731,7 +4731,7 @@
           <p:cNvPr id="9" name="">
             <a:extLst xmlns:a="http://schemas.openxmlformats.org/drawingml/2006/main">
               <a:ext uri="{FF2B5EF4-FFF2-40B4-BE49-F238E27FC236}">
-                <a16:creationId xmlns:a16="http://schemas.microsoft.com/office/drawing/2014/main" id="{59AED2F1-8036-401B-B39A-A7D6307DB304}"/>
+                <a16:creationId xmlns:a16="http://schemas.microsoft.com/office/drawing/2014/main" id="{666801F3-ADBB-4FD3-AB0C-6EAD6F4F0795}"/>
               </a:ext>
             </a:extLst>
           </p:cNvPr>
@@ -4788,7 +4788,7 @@
           <p:cNvPr id="10" name="">
             <a:extLst xmlns:a="http://schemas.openxmlformats.org/drawingml/2006/main">
               <a:ext uri="{FF2B5EF4-FFF2-40B4-BE49-F238E27FC236}">
-                <a16:creationId xmlns:a16="http://schemas.microsoft.com/office/drawing/2014/main" id="{4BB094E6-1856-45C5-9A64-90F76E09E541}"/>
+                <a16:creationId xmlns:a16="http://schemas.microsoft.com/office/drawing/2014/main" id="{CF5C7A33-F526-4319-A4C4-6BAEAA8DD380}"/>
               </a:ext>
             </a:extLst>
           </p:cNvPr>
@@ -4822,7 +4822,7 @@
           <p:cNvPr id="11" name="">
             <a:extLst xmlns:a="http://schemas.openxmlformats.org/drawingml/2006/main">
               <a:ext uri="{FF2B5EF4-FFF2-40B4-BE49-F238E27FC236}">
-                <a16:creationId xmlns:a16="http://schemas.microsoft.com/office/drawing/2014/main" id="{9851C216-8E70-4115-B4AD-7792B93E52E2}"/>
+                <a16:creationId xmlns:a16="http://schemas.microsoft.com/office/drawing/2014/main" id="{164B24C8-38B6-4929-8532-6155B3438B26}"/>
               </a:ext>
             </a:extLst>
           </p:cNvPr>
@@ -4854,7 +4854,7 @@
           <p:cNvPr id="12" name="">
             <a:extLst xmlns:a="http://schemas.openxmlformats.org/drawingml/2006/main">
               <a:ext uri="{FF2B5EF4-FFF2-40B4-BE49-F238E27FC236}">
-                <a16:creationId xmlns:a16="http://schemas.microsoft.com/office/drawing/2014/main" id="{5DB2C6CE-A09D-4D05-BFB4-E07BB3864BDD}"/>
+                <a16:creationId xmlns:a16="http://schemas.microsoft.com/office/drawing/2014/main" id="{C1457986-C2B9-4853-AF6C-9F8D83340CC2}"/>
               </a:ext>
             </a:extLst>
           </p:cNvPr>
@@ -4911,7 +4911,7 @@
           <p:cNvPr id="13" name="">
             <a:extLst xmlns:a="http://schemas.openxmlformats.org/drawingml/2006/main">
               <a:ext uri="{FF2B5EF4-FFF2-40B4-BE49-F238E27FC236}">
-                <a16:creationId xmlns:a16="http://schemas.microsoft.com/office/drawing/2014/main" id="{9FD184AA-658E-4303-8C60-6B02D4E65B90}"/>
+                <a16:creationId xmlns:a16="http://schemas.microsoft.com/office/drawing/2014/main" id="{6628CD3D-EBC6-4872-9C66-E0AE671A3414}"/>
               </a:ext>
             </a:extLst>
           </p:cNvPr>
@@ -4968,7 +4968,7 @@
           <p:cNvPr id="14" name="">
             <a:extLst xmlns:a="http://schemas.openxmlformats.org/drawingml/2006/main">
               <a:ext uri="{FF2B5EF4-FFF2-40B4-BE49-F238E27FC236}">
-                <a16:creationId xmlns:a16="http://schemas.microsoft.com/office/drawing/2014/main" id="{A4E94529-1D3E-424E-982A-85A4AC409705}"/>
+                <a16:creationId xmlns:a16="http://schemas.microsoft.com/office/drawing/2014/main" id="{D13B7D34-82C7-4367-BC22-5C496EFB259A}"/>
               </a:ext>
             </a:extLst>
           </p:cNvPr>
@@ -5002,7 +5002,7 @@
           <p:cNvPr id="15" name="">
             <a:extLst xmlns:a="http://schemas.openxmlformats.org/drawingml/2006/main">
               <a:ext uri="{FF2B5EF4-FFF2-40B4-BE49-F238E27FC236}">
-                <a16:creationId xmlns:a16="http://schemas.microsoft.com/office/drawing/2014/main" id="{7E03D260-6356-4DF7-9360-7F7D30D16F73}"/>
+                <a16:creationId xmlns:a16="http://schemas.microsoft.com/office/drawing/2014/main" id="{8F1F2DF2-2072-4629-938C-782C9D425EF5}"/>
               </a:ext>
             </a:extLst>
           </p:cNvPr>
@@ -5034,7 +5034,7 @@
           <p:cNvPr id="16" name="">
             <a:extLst xmlns:a="http://schemas.openxmlformats.org/drawingml/2006/main">
               <a:ext uri="{FF2B5EF4-FFF2-40B4-BE49-F238E27FC236}">
-                <a16:creationId xmlns:a16="http://schemas.microsoft.com/office/drawing/2014/main" id="{26EFE643-DA1E-4DEB-ADFA-D39E5612CA30}"/>
+                <a16:creationId xmlns:a16="http://schemas.microsoft.com/office/drawing/2014/main" id="{8DE17108-A82B-4CCF-9526-7DAEB06995D2}"/>
               </a:ext>
             </a:extLst>
           </p:cNvPr>
@@ -5091,7 +5091,7 @@
           <p:cNvPr id="17" name="">
             <a:extLst xmlns:a="http://schemas.openxmlformats.org/drawingml/2006/main">
               <a:ext uri="{FF2B5EF4-FFF2-40B4-BE49-F238E27FC236}">
-                <a16:creationId xmlns:a16="http://schemas.microsoft.com/office/drawing/2014/main" id="{09EB7D64-1F82-4B94-B149-F8D7F6C38CE0}"/>
+                <a16:creationId xmlns:a16="http://schemas.microsoft.com/office/drawing/2014/main" id="{ECC19DAF-0E90-446C-AE15-60AC490C221B}"/>
               </a:ext>
             </a:extLst>
           </p:cNvPr>
@@ -5148,7 +5148,7 @@
           <p:cNvPr id="18" name="">
             <a:extLst xmlns:a="http://schemas.openxmlformats.org/drawingml/2006/main">
               <a:ext uri="{FF2B5EF4-FFF2-40B4-BE49-F238E27FC236}">
-                <a16:creationId xmlns:a16="http://schemas.microsoft.com/office/drawing/2014/main" id="{1584DD16-BACD-4A9A-A55F-73C690953D26}"/>
+                <a16:creationId xmlns:a16="http://schemas.microsoft.com/office/drawing/2014/main" id="{4888D122-7DFD-4CC0-9EEA-71922FF8A8F5}"/>
               </a:ext>
             </a:extLst>
           </p:cNvPr>
@@ -5182,7 +5182,7 @@
           <p:cNvPr id="19" name="">
             <a:extLst xmlns:a="http://schemas.openxmlformats.org/drawingml/2006/main">
               <a:ext uri="{FF2B5EF4-FFF2-40B4-BE49-F238E27FC236}">
-                <a16:creationId xmlns:a16="http://schemas.microsoft.com/office/drawing/2014/main" id="{C5E51367-2CEE-40FE-8700-868228FD5E2E}"/>
+                <a16:creationId xmlns:a16="http://schemas.microsoft.com/office/drawing/2014/main" id="{4D5DC1FA-2075-4F60-8470-427A615887DE}"/>
               </a:ext>
             </a:extLst>
           </p:cNvPr>
@@ -5214,7 +5214,7 @@
           <p:cNvPr id="20" name="">
             <a:extLst xmlns:a="http://schemas.openxmlformats.org/drawingml/2006/main">
               <a:ext uri="{FF2B5EF4-FFF2-40B4-BE49-F238E27FC236}">
-                <a16:creationId xmlns:a16="http://schemas.microsoft.com/office/drawing/2014/main" id="{2348B203-0068-4CDD-844D-55A034EEFCD3}"/>
+                <a16:creationId xmlns:a16="http://schemas.microsoft.com/office/drawing/2014/main" id="{0E1E8A6D-B4D7-4330-AC5D-61843C09F20A}"/>
               </a:ext>
             </a:extLst>
           </p:cNvPr>
@@ -5271,7 +5271,7 @@
           <p:cNvPr id="21" name="">
             <a:extLst xmlns:a="http://schemas.openxmlformats.org/drawingml/2006/main">
               <a:ext uri="{FF2B5EF4-FFF2-40B4-BE49-F238E27FC236}">
-                <a16:creationId xmlns:a16="http://schemas.microsoft.com/office/drawing/2014/main" id="{E104063F-F6B1-4DEE-8E66-E83EB58D0EFD}"/>
+                <a16:creationId xmlns:a16="http://schemas.microsoft.com/office/drawing/2014/main" id="{786D0AE3-7708-40AD-A185-98DE6DC7D2A7}"/>
               </a:ext>
             </a:extLst>
           </p:cNvPr>
@@ -5328,7 +5328,7 @@
           <p:cNvPr id="22" name="">
             <a:extLst xmlns:a="http://schemas.openxmlformats.org/drawingml/2006/main">
               <a:ext uri="{FF2B5EF4-FFF2-40B4-BE49-F238E27FC236}">
-                <a16:creationId xmlns:a16="http://schemas.microsoft.com/office/drawing/2014/main" id="{4C37607F-7D49-4582-9C3C-A8936A760AF2}"/>
+                <a16:creationId xmlns:a16="http://schemas.microsoft.com/office/drawing/2014/main" id="{3883B451-1AC4-4782-95BE-F17578658EB5}"/>
               </a:ext>
             </a:extLst>
           </p:cNvPr>
@@ -5383,7 +5383,7 @@
     </p:spTree>
     <p:extLst>
       <p:ext uri="{BB962C8B-B14F-4D97-AF65-F5344CB8AC3E}">
-        <p14:creationId xmlns:p14="http://schemas.microsoft.com/office/powerpoint/2010/main" val="1814908346"/>
+        <p14:creationId xmlns:p14="http://schemas.microsoft.com/office/powerpoint/2010/main" val="1058201293"/>
       </p:ext>
     </p:extLst>
   </p:cSld>
@@ -5584,7 +5584,7 @@
           <p:cNvPr id="23" name="">
             <a:extLst xmlns:a="http://schemas.openxmlformats.org/drawingml/2006/main">
               <a:ext uri="{FF2B5EF4-FFF2-40B4-BE49-F238E27FC236}">
-                <a16:creationId xmlns:a16="http://schemas.microsoft.com/office/drawing/2014/main" id="{8230356C-CDA1-4BA5-9DEF-79EB39EDC65B}"/>
+                <a16:creationId xmlns:a16="http://schemas.microsoft.com/office/drawing/2014/main" id="{F539A7BC-622C-41B1-B7D2-5BF1E8708183}"/>
               </a:ext>
             </a:extLst>
           </p:cNvPr>
@@ -5616,7 +5616,7 @@
           <p:cNvPr id="2" name="">
             <a:extLst xmlns:a="http://schemas.openxmlformats.org/drawingml/2006/main">
               <a:ext uri="{FF2B5EF4-FFF2-40B4-BE49-F238E27FC236}">
-                <a16:creationId xmlns:a16="http://schemas.microsoft.com/office/drawing/2014/main" id="{84DA2E4F-1253-403F-AF57-EEAC219C6747}"/>
+                <a16:creationId xmlns:a16="http://schemas.microsoft.com/office/drawing/2014/main" id="{BACDAF34-CD82-4FAC-8850-47C9E39EBBCF}"/>
               </a:ext>
             </a:extLst>
           </p:cNvPr>
@@ -5673,7 +5673,7 @@
           <p:cNvPr id="3" name="">
             <a:extLst xmlns:a="http://schemas.openxmlformats.org/drawingml/2006/main">
               <a:ext uri="{FF2B5EF4-FFF2-40B4-BE49-F238E27FC236}">
-                <a16:creationId xmlns:a16="http://schemas.microsoft.com/office/drawing/2014/main" id="{2C113045-A381-48C2-9587-17E9187E2358}"/>
+                <a16:creationId xmlns:a16="http://schemas.microsoft.com/office/drawing/2014/main" id="{34DB1E68-6B42-437E-8819-D2D73459A015}"/>
               </a:ext>
             </a:extLst>
           </p:cNvPr>
@@ -5705,7 +5705,7 @@
           <p:cNvPr id="4" name="">
             <a:extLst xmlns:a="http://schemas.openxmlformats.org/drawingml/2006/main">
               <a:ext uri="{FF2B5EF4-FFF2-40B4-BE49-F238E27FC236}">
-                <a16:creationId xmlns:a16="http://schemas.microsoft.com/office/drawing/2014/main" id="{599C9073-64E0-4EBA-8C1E-E3107C646E07}"/>
+                <a16:creationId xmlns:a16="http://schemas.microsoft.com/office/drawing/2014/main" id="{68B431FA-85A7-4295-BAEF-E2D1408A3121}"/>
               </a:ext>
             </a:extLst>
           </p:cNvPr>
@@ -5762,7 +5762,7 @@
           <p:cNvPr id="5" name="">
             <a:extLst xmlns:a="http://schemas.openxmlformats.org/drawingml/2006/main">
               <a:ext uri="{FF2B5EF4-FFF2-40B4-BE49-F238E27FC236}">
-                <a16:creationId xmlns:a16="http://schemas.microsoft.com/office/drawing/2014/main" id="{F0CED7B0-19AD-4914-800D-802399262E89}"/>
+                <a16:creationId xmlns:a16="http://schemas.microsoft.com/office/drawing/2014/main" id="{4718F966-4C28-4B1F-B86A-472A33D16869}"/>
               </a:ext>
             </a:extLst>
           </p:cNvPr>
@@ -5819,7 +5819,7 @@
           <p:cNvPr id="6" name="">
             <a:extLst xmlns:a="http://schemas.openxmlformats.org/drawingml/2006/main">
               <a:ext uri="{FF2B5EF4-FFF2-40B4-BE49-F238E27FC236}">
-                <a16:creationId xmlns:a16="http://schemas.microsoft.com/office/drawing/2014/main" id="{961D4A4C-1880-42AB-91E9-CC7D9ED5989B}"/>
+                <a16:creationId xmlns:a16="http://schemas.microsoft.com/office/drawing/2014/main" id="{9B0A0155-44D8-424C-8054-9F355B3C954A}"/>
               </a:ext>
             </a:extLst>
           </p:cNvPr>
@@ -5876,7 +5876,7 @@
           <p:cNvPr id="7" name="">
             <a:extLst xmlns:a="http://schemas.openxmlformats.org/drawingml/2006/main">
               <a:ext uri="{FF2B5EF4-FFF2-40B4-BE49-F238E27FC236}">
-                <a16:creationId xmlns:a16="http://schemas.microsoft.com/office/drawing/2014/main" id="{6EE4A3FE-9A5C-4BB8-8667-1C31274D519D}"/>
+                <a16:creationId xmlns:a16="http://schemas.microsoft.com/office/drawing/2014/main" id="{E0F3D74E-EDE9-4112-8CDE-F1D3C5B2078C}"/>
               </a:ext>
             </a:extLst>
           </p:cNvPr>
@@ -5908,7 +5908,7 @@
           <p:cNvPr id="8" name="">
             <a:extLst xmlns:a="http://schemas.openxmlformats.org/drawingml/2006/main">
               <a:ext uri="{FF2B5EF4-FFF2-40B4-BE49-F238E27FC236}">
-                <a16:creationId xmlns:a16="http://schemas.microsoft.com/office/drawing/2014/main" id="{2D2BB3C3-0CBE-4C62-9313-32965A6C53B5}"/>
+                <a16:creationId xmlns:a16="http://schemas.microsoft.com/office/drawing/2014/main" id="{6D68E2D5-B5CE-42FF-8CAC-B0247D89CFB8}"/>
               </a:ext>
             </a:extLst>
           </p:cNvPr>
@@ -5965,7 +5965,7 @@
           <p:cNvPr id="9" name="">
             <a:extLst xmlns:a="http://schemas.openxmlformats.org/drawingml/2006/main">
               <a:ext uri="{FF2B5EF4-FFF2-40B4-BE49-F238E27FC236}">
-                <a16:creationId xmlns:a16="http://schemas.microsoft.com/office/drawing/2014/main" id="{6FBB58B5-2DAE-4BE9-91D1-9515688BD41A}"/>
+                <a16:creationId xmlns:a16="http://schemas.microsoft.com/office/drawing/2014/main" id="{46E14FE9-BD7C-4DE9-B4D4-51E0FC9A7607}"/>
               </a:ext>
             </a:extLst>
           </p:cNvPr>
@@ -6022,7 +6022,7 @@
           <p:cNvPr id="10" name="">
             <a:extLst xmlns:a="http://schemas.openxmlformats.org/drawingml/2006/main">
               <a:ext uri="{FF2B5EF4-FFF2-40B4-BE49-F238E27FC236}">
-                <a16:creationId xmlns:a16="http://schemas.microsoft.com/office/drawing/2014/main" id="{77E1B678-61AC-454C-A25C-A4CFB6A37504}"/>
+                <a16:creationId xmlns:a16="http://schemas.microsoft.com/office/drawing/2014/main" id="{2148A28A-2F20-4774-8B75-FB88ECE150EE}"/>
               </a:ext>
             </a:extLst>
           </p:cNvPr>
@@ -6056,7 +6056,7 @@
           <p:cNvPr id="11" name="">
             <a:extLst xmlns:a="http://schemas.openxmlformats.org/drawingml/2006/main">
               <a:ext uri="{FF2B5EF4-FFF2-40B4-BE49-F238E27FC236}">
-                <a16:creationId xmlns:a16="http://schemas.microsoft.com/office/drawing/2014/main" id="{2FC072C2-1785-4C91-A49F-E336F2FD8130}"/>
+                <a16:creationId xmlns:a16="http://schemas.microsoft.com/office/drawing/2014/main" id="{486A06C1-345E-4217-B869-D45BC4D0B635}"/>
               </a:ext>
             </a:extLst>
           </p:cNvPr>
@@ -6088,7 +6088,7 @@
           <p:cNvPr id="12" name="">
             <a:extLst xmlns:a="http://schemas.openxmlformats.org/drawingml/2006/main">
               <a:ext uri="{FF2B5EF4-FFF2-40B4-BE49-F238E27FC236}">
-                <a16:creationId xmlns:a16="http://schemas.microsoft.com/office/drawing/2014/main" id="{4E729D56-4D2D-4298-9E6C-5FF2F4D1A6AA}"/>
+                <a16:creationId xmlns:a16="http://schemas.microsoft.com/office/drawing/2014/main" id="{14193D24-1647-41CB-BB43-963F0FF267B9}"/>
               </a:ext>
             </a:extLst>
           </p:cNvPr>
@@ -6145,7 +6145,7 @@
           <p:cNvPr id="13" name="">
             <a:extLst xmlns:a="http://schemas.openxmlformats.org/drawingml/2006/main">
               <a:ext uri="{FF2B5EF4-FFF2-40B4-BE49-F238E27FC236}">
-                <a16:creationId xmlns:a16="http://schemas.microsoft.com/office/drawing/2014/main" id="{772B9506-F7FF-4999-AEDF-E477563BC1DB}"/>
+                <a16:creationId xmlns:a16="http://schemas.microsoft.com/office/drawing/2014/main" id="{87E9C221-BF59-4C1B-ADC5-93E00CD6BE05}"/>
               </a:ext>
             </a:extLst>
           </p:cNvPr>
@@ -6202,7 +6202,7 @@
           <p:cNvPr id="14" name="">
             <a:extLst xmlns:a="http://schemas.openxmlformats.org/drawingml/2006/main">
               <a:ext uri="{FF2B5EF4-FFF2-40B4-BE49-F238E27FC236}">
-                <a16:creationId xmlns:a16="http://schemas.microsoft.com/office/drawing/2014/main" id="{5E46130A-B405-4D3D-9139-30001ABEFD28}"/>
+                <a16:creationId xmlns:a16="http://schemas.microsoft.com/office/drawing/2014/main" id="{350E4EAC-366A-4BA3-B617-0E09676988DD}"/>
               </a:ext>
             </a:extLst>
           </p:cNvPr>
@@ -6236,7 +6236,7 @@
           <p:cNvPr id="15" name="">
             <a:extLst xmlns:a="http://schemas.openxmlformats.org/drawingml/2006/main">
               <a:ext uri="{FF2B5EF4-FFF2-40B4-BE49-F238E27FC236}">
-                <a16:creationId xmlns:a16="http://schemas.microsoft.com/office/drawing/2014/main" id="{6CCA0BC8-CD7C-4989-A92D-BBFFD8E30477}"/>
+                <a16:creationId xmlns:a16="http://schemas.microsoft.com/office/drawing/2014/main" id="{B770208A-8B56-4275-9E96-8B66DD31B9DB}"/>
               </a:ext>
             </a:extLst>
           </p:cNvPr>
@@ -6268,7 +6268,7 @@
           <p:cNvPr id="16" name="">
             <a:extLst xmlns:a="http://schemas.openxmlformats.org/drawingml/2006/main">
               <a:ext uri="{FF2B5EF4-FFF2-40B4-BE49-F238E27FC236}">
-                <a16:creationId xmlns:a16="http://schemas.microsoft.com/office/drawing/2014/main" id="{59B2DCE1-74A6-43C2-8704-CCD4B3932D42}"/>
+                <a16:creationId xmlns:a16="http://schemas.microsoft.com/office/drawing/2014/main" id="{3E43035F-0014-4620-AA11-9F8A28297AA1}"/>
               </a:ext>
             </a:extLst>
           </p:cNvPr>
@@ -6325,7 +6325,7 @@
           <p:cNvPr id="17" name="">
             <a:extLst xmlns:a="http://schemas.openxmlformats.org/drawingml/2006/main">
               <a:ext uri="{FF2B5EF4-FFF2-40B4-BE49-F238E27FC236}">
-                <a16:creationId xmlns:a16="http://schemas.microsoft.com/office/drawing/2014/main" id="{8134D5FC-F6E2-4D1F-85C0-647CD2A9A14D}"/>
+                <a16:creationId xmlns:a16="http://schemas.microsoft.com/office/drawing/2014/main" id="{E36819B6-3335-484C-BE11-2B2F6E1D8DF6}"/>
               </a:ext>
             </a:extLst>
           </p:cNvPr>
@@ -6382,7 +6382,7 @@
           <p:cNvPr id="18" name="">
             <a:extLst xmlns:a="http://schemas.openxmlformats.org/drawingml/2006/main">
               <a:ext uri="{FF2B5EF4-FFF2-40B4-BE49-F238E27FC236}">
-                <a16:creationId xmlns:a16="http://schemas.microsoft.com/office/drawing/2014/main" id="{14372192-5475-411F-AAA8-A119553AED7F}"/>
+                <a16:creationId xmlns:a16="http://schemas.microsoft.com/office/drawing/2014/main" id="{C213CCCB-7DB0-45EB-8F61-4CC16B2E8277}"/>
               </a:ext>
             </a:extLst>
           </p:cNvPr>
@@ -6416,7 +6416,7 @@
           <p:cNvPr id="19" name="">
             <a:extLst xmlns:a="http://schemas.openxmlformats.org/drawingml/2006/main">
               <a:ext uri="{FF2B5EF4-FFF2-40B4-BE49-F238E27FC236}">
-                <a16:creationId xmlns:a16="http://schemas.microsoft.com/office/drawing/2014/main" id="{3EF180FA-E5FC-41EE-9927-73D0E6309A87}"/>
+                <a16:creationId xmlns:a16="http://schemas.microsoft.com/office/drawing/2014/main" id="{2A8E94DC-12D1-4B08-887E-030BC9A24606}"/>
               </a:ext>
             </a:extLst>
           </p:cNvPr>
@@ -6448,7 +6448,7 @@
           <p:cNvPr id="20" name="">
             <a:extLst xmlns:a="http://schemas.openxmlformats.org/drawingml/2006/main">
               <a:ext uri="{FF2B5EF4-FFF2-40B4-BE49-F238E27FC236}">
-                <a16:creationId xmlns:a16="http://schemas.microsoft.com/office/drawing/2014/main" id="{5C4F2F95-BFDD-490E-9E3A-3B2E42962129}"/>
+                <a16:creationId xmlns:a16="http://schemas.microsoft.com/office/drawing/2014/main" id="{5F2DE640-9CA0-4AB1-A274-50462784FC6E}"/>
               </a:ext>
             </a:extLst>
           </p:cNvPr>
@@ -6505,7 +6505,7 @@
           <p:cNvPr id="21" name="">
             <a:extLst xmlns:a="http://schemas.openxmlformats.org/drawingml/2006/main">
               <a:ext uri="{FF2B5EF4-FFF2-40B4-BE49-F238E27FC236}">
-                <a16:creationId xmlns:a16="http://schemas.microsoft.com/office/drawing/2014/main" id="{BC4C50D9-5A35-4DC5-9E46-99B928D24982}"/>
+                <a16:creationId xmlns:a16="http://schemas.microsoft.com/office/drawing/2014/main" id="{DE02ACF0-AB5C-44AD-A971-E3BD6550A941}"/>
               </a:ext>
             </a:extLst>
           </p:cNvPr>
@@ -6562,7 +6562,7 @@
           <p:cNvPr id="22" name="">
             <a:extLst xmlns:a="http://schemas.openxmlformats.org/drawingml/2006/main">
               <a:ext uri="{FF2B5EF4-FFF2-40B4-BE49-F238E27FC236}">
-                <a16:creationId xmlns:a16="http://schemas.microsoft.com/office/drawing/2014/main" id="{F1A6382A-F536-4D00-A4AC-7C5927347134}"/>
+                <a16:creationId xmlns:a16="http://schemas.microsoft.com/office/drawing/2014/main" id="{CE3FB1F2-83DF-493E-8D36-4AD157E30AA9}"/>
               </a:ext>
             </a:extLst>
           </p:cNvPr>
@@ -6617,7 +6617,7 @@
     </p:spTree>
     <p:extLst>
       <p:ext uri="{BB962C8B-B14F-4D97-AF65-F5344CB8AC3E}">
-        <p14:creationId xmlns:p14="http://schemas.microsoft.com/office/powerpoint/2010/main" val="1467747426"/>
+        <p14:creationId xmlns:p14="http://schemas.microsoft.com/office/powerpoint/2010/main" val="291722454"/>
       </p:ext>
     </p:extLst>
   </p:cSld>
@@ -6818,7 +6818,7 @@
           <p:cNvPr id="16" name="">
             <a:extLst xmlns:a="http://schemas.openxmlformats.org/drawingml/2006/main">
               <a:ext uri="{FF2B5EF4-FFF2-40B4-BE49-F238E27FC236}">
-                <a16:creationId xmlns:a16="http://schemas.microsoft.com/office/drawing/2014/main" id="{8E73FB06-86D6-4DF5-B805-1ADF45B8D3C9}"/>
+                <a16:creationId xmlns:a16="http://schemas.microsoft.com/office/drawing/2014/main" id="{2D762633-45DD-4FBB-BB23-2A58E040CB5A}"/>
               </a:ext>
             </a:extLst>
           </p:cNvPr>
@@ -6850,7 +6850,7 @@
           <p:cNvPr id="2" name="">
             <a:extLst xmlns:a="http://schemas.openxmlformats.org/drawingml/2006/main">
               <a:ext uri="{FF2B5EF4-FFF2-40B4-BE49-F238E27FC236}">
-                <a16:creationId xmlns:a16="http://schemas.microsoft.com/office/drawing/2014/main" id="{2BCA441D-9105-4B14-BAA6-1158F2A5856D}"/>
+                <a16:creationId xmlns:a16="http://schemas.microsoft.com/office/drawing/2014/main" id="{987A5B70-2720-4CCA-A236-B003F513AC35}"/>
               </a:ext>
             </a:extLst>
           </p:cNvPr>
@@ -6907,7 +6907,7 @@
           <p:cNvPr id="3" name="">
             <a:extLst xmlns:a="http://schemas.openxmlformats.org/drawingml/2006/main">
               <a:ext uri="{FF2B5EF4-FFF2-40B4-BE49-F238E27FC236}">
-                <a16:creationId xmlns:a16="http://schemas.microsoft.com/office/drawing/2014/main" id="{C445BEE1-DB27-4C55-974D-F8503999A173}"/>
+                <a16:creationId xmlns:a16="http://schemas.microsoft.com/office/drawing/2014/main" id="{35EAB75B-5D47-4A80-BE5F-C53F56EDD6BC}"/>
               </a:ext>
             </a:extLst>
           </p:cNvPr>
@@ -6939,7 +6939,7 @@
           <p:cNvPr id="4" name="">
             <a:extLst xmlns:a="http://schemas.openxmlformats.org/drawingml/2006/main">
               <a:ext uri="{FF2B5EF4-FFF2-40B4-BE49-F238E27FC236}">
-                <a16:creationId xmlns:a16="http://schemas.microsoft.com/office/drawing/2014/main" id="{3B35D2A9-0043-4005-83E2-7B8817442824}"/>
+                <a16:creationId xmlns:a16="http://schemas.microsoft.com/office/drawing/2014/main" id="{CA0833BF-0122-44FC-8C32-62FA005B28FF}"/>
               </a:ext>
             </a:extLst>
           </p:cNvPr>
@@ -6996,7 +6996,7 @@
           <p:cNvPr id="5" name="">
             <a:extLst xmlns:a="http://schemas.openxmlformats.org/drawingml/2006/main">
               <a:ext uri="{FF2B5EF4-FFF2-40B4-BE49-F238E27FC236}">
-                <a16:creationId xmlns:a16="http://schemas.microsoft.com/office/drawing/2014/main" id="{05D9AD38-6163-4CA6-A790-E208907C1CFF}"/>
+                <a16:creationId xmlns:a16="http://schemas.microsoft.com/office/drawing/2014/main" id="{35374D7B-7830-4E77-A7B8-01C70D9789C0}"/>
               </a:ext>
             </a:extLst>
           </p:cNvPr>
@@ -7053,7 +7053,7 @@
           <p:cNvPr id="6" name="">
             <a:extLst xmlns:a="http://schemas.openxmlformats.org/drawingml/2006/main">
               <a:ext uri="{FF2B5EF4-FFF2-40B4-BE49-F238E27FC236}">
-                <a16:creationId xmlns:a16="http://schemas.microsoft.com/office/drawing/2014/main" id="{349F77F7-E628-4C87-BA05-B2E0EBA10AB9}"/>
+                <a16:creationId xmlns:a16="http://schemas.microsoft.com/office/drawing/2014/main" id="{56918A85-4F5C-4AAE-9594-5BB3977AE6E6}"/>
               </a:ext>
             </a:extLst>
           </p:cNvPr>
@@ -7110,7 +7110,7 @@
           <p:cNvPr id="7" name="">
             <a:extLst xmlns:a="http://schemas.openxmlformats.org/drawingml/2006/main">
               <a:ext uri="{FF2B5EF4-FFF2-40B4-BE49-F238E27FC236}">
-                <a16:creationId xmlns:a16="http://schemas.microsoft.com/office/drawing/2014/main" id="{AD75B73C-59BE-49B6-A1DD-8B22F300E1CF}"/>
+                <a16:creationId xmlns:a16="http://schemas.microsoft.com/office/drawing/2014/main" id="{F85DD665-C5BB-4B2C-ACB5-B70401C973B1}"/>
               </a:ext>
             </a:extLst>
           </p:cNvPr>
@@ -7142,7 +7142,7 @@
           <p:cNvPr id="8" name="">
             <a:extLst xmlns:a="http://schemas.openxmlformats.org/drawingml/2006/main">
               <a:ext uri="{FF2B5EF4-FFF2-40B4-BE49-F238E27FC236}">
-                <a16:creationId xmlns:a16="http://schemas.microsoft.com/office/drawing/2014/main" id="{610FA819-07AE-4280-AFE1-94579C55B413}"/>
+                <a16:creationId xmlns:a16="http://schemas.microsoft.com/office/drawing/2014/main" id="{817CE1B3-5228-4085-93EE-BD7DAC94ED23}"/>
               </a:ext>
             </a:extLst>
           </p:cNvPr>
@@ -7199,7 +7199,7 @@
           <p:cNvPr id="9" name="">
             <a:extLst xmlns:a="http://schemas.openxmlformats.org/drawingml/2006/main">
               <a:ext uri="{FF2B5EF4-FFF2-40B4-BE49-F238E27FC236}">
-                <a16:creationId xmlns:a16="http://schemas.microsoft.com/office/drawing/2014/main" id="{F30C569F-F60A-4D14-AA84-D80E583FBB96}"/>
+                <a16:creationId xmlns:a16="http://schemas.microsoft.com/office/drawing/2014/main" id="{C683E01F-10D2-4F9E-B756-CC85866BE67C}"/>
               </a:ext>
             </a:extLst>
           </p:cNvPr>
@@ -7256,7 +7256,7 @@
           <p:cNvPr id="10" name="">
             <a:extLst xmlns:a="http://schemas.openxmlformats.org/drawingml/2006/main">
               <a:ext uri="{FF2B5EF4-FFF2-40B4-BE49-F238E27FC236}">
-                <a16:creationId xmlns:a16="http://schemas.microsoft.com/office/drawing/2014/main" id="{008A088A-5381-41EF-B9B7-B2D1A0D32487}"/>
+                <a16:creationId xmlns:a16="http://schemas.microsoft.com/office/drawing/2014/main" id="{51ED57A2-553B-4B36-86E9-F3F59A8C2C2D}"/>
               </a:ext>
             </a:extLst>
           </p:cNvPr>
@@ -7313,7 +7313,7 @@
           <p:cNvPr id="11" name="">
             <a:extLst xmlns:a="http://schemas.openxmlformats.org/drawingml/2006/main">
               <a:ext uri="{FF2B5EF4-FFF2-40B4-BE49-F238E27FC236}">
-                <a16:creationId xmlns:a16="http://schemas.microsoft.com/office/drawing/2014/main" id="{EB6A69A7-8905-4B26-880F-4C3CF98AC6BB}"/>
+                <a16:creationId xmlns:a16="http://schemas.microsoft.com/office/drawing/2014/main" id="{FC476D5D-4415-49B9-BD0E-95C534C1916D}"/>
               </a:ext>
             </a:extLst>
           </p:cNvPr>
@@ -7345,7 +7345,7 @@
           <p:cNvPr id="12" name="">
             <a:extLst xmlns:a="http://schemas.openxmlformats.org/drawingml/2006/main">
               <a:ext uri="{FF2B5EF4-FFF2-40B4-BE49-F238E27FC236}">
-                <a16:creationId xmlns:a16="http://schemas.microsoft.com/office/drawing/2014/main" id="{ED5E5267-7971-48A5-AEEF-042D985355AF}"/>
+                <a16:creationId xmlns:a16="http://schemas.microsoft.com/office/drawing/2014/main" id="{6F562015-53B4-4044-8F07-9902629016CD}"/>
               </a:ext>
             </a:extLst>
           </p:cNvPr>
@@ -7402,7 +7402,7 @@
           <p:cNvPr id="13" name="">
             <a:extLst xmlns:a="http://schemas.openxmlformats.org/drawingml/2006/main">
               <a:ext uri="{FF2B5EF4-FFF2-40B4-BE49-F238E27FC236}">
-                <a16:creationId xmlns:a16="http://schemas.microsoft.com/office/drawing/2014/main" id="{0AD3FA80-560D-4D52-A434-E03CE3BC8718}"/>
+                <a16:creationId xmlns:a16="http://schemas.microsoft.com/office/drawing/2014/main" id="{DDF8C3EE-1DB8-45D3-ACD6-8A86341AADBD}"/>
               </a:ext>
             </a:extLst>
           </p:cNvPr>
@@ -7459,7 +7459,7 @@
           <p:cNvPr id="14" name="">
             <a:extLst xmlns:a="http://schemas.openxmlformats.org/drawingml/2006/main">
               <a:ext uri="{FF2B5EF4-FFF2-40B4-BE49-F238E27FC236}">
-                <a16:creationId xmlns:a16="http://schemas.microsoft.com/office/drawing/2014/main" id="{13EAB1AA-DD9F-4D83-8AB5-5E1252E7D321}"/>
+                <a16:creationId xmlns:a16="http://schemas.microsoft.com/office/drawing/2014/main" id="{5CE18391-E970-40D7-B885-B048D97CC01F}"/>
               </a:ext>
             </a:extLst>
           </p:cNvPr>
@@ -7516,7 +7516,7 @@
           <p:cNvPr id="15" name="">
             <a:extLst xmlns:a="http://schemas.openxmlformats.org/drawingml/2006/main">
               <a:ext uri="{FF2B5EF4-FFF2-40B4-BE49-F238E27FC236}">
-                <a16:creationId xmlns:a16="http://schemas.microsoft.com/office/drawing/2014/main" id="{04076BEA-6064-44C5-B8AD-C67F21B1C7CA}"/>
+                <a16:creationId xmlns:a16="http://schemas.microsoft.com/office/drawing/2014/main" id="{8DE09B52-D4C6-4E68-B45B-196129245180}"/>
               </a:ext>
             </a:extLst>
           </p:cNvPr>
@@ -7571,7 +7571,7 @@
     </p:spTree>
     <p:extLst>
       <p:ext uri="{BB962C8B-B14F-4D97-AF65-F5344CB8AC3E}">
-        <p14:creationId xmlns:p14="http://schemas.microsoft.com/office/powerpoint/2010/main" val="23909683"/>
+        <p14:creationId xmlns:p14="http://schemas.microsoft.com/office/powerpoint/2010/main" val="2020299775"/>
       </p:ext>
     </p:extLst>
   </p:cSld>
@@ -7772,7 +7772,7 @@
           <p:cNvPr id="23" name="">
             <a:extLst xmlns:a="http://schemas.openxmlformats.org/drawingml/2006/main">
               <a:ext uri="{FF2B5EF4-FFF2-40B4-BE49-F238E27FC236}">
-                <a16:creationId xmlns:a16="http://schemas.microsoft.com/office/drawing/2014/main" id="{27DFB69C-ADEB-4040-A785-AF7C6CCF5932}"/>
+                <a16:creationId xmlns:a16="http://schemas.microsoft.com/office/drawing/2014/main" id="{F2DBA688-7452-42D4-9730-987EA67052D8}"/>
               </a:ext>
             </a:extLst>
           </p:cNvPr>
@@ -7804,7 +7804,7 @@
           <p:cNvPr id="2" name="">
             <a:extLst xmlns:a="http://schemas.openxmlformats.org/drawingml/2006/main">
               <a:ext uri="{FF2B5EF4-FFF2-40B4-BE49-F238E27FC236}">
-                <a16:creationId xmlns:a16="http://schemas.microsoft.com/office/drawing/2014/main" id="{C2A64AB1-E7AF-40B0-8E48-E53C78C47A4C}"/>
+                <a16:creationId xmlns:a16="http://schemas.microsoft.com/office/drawing/2014/main" id="{AFB04AA1-8C29-41BF-B558-3CD82CA2FB4E}"/>
               </a:ext>
             </a:extLst>
           </p:cNvPr>
@@ -7861,7 +7861,7 @@
           <p:cNvPr id="3" name="">
             <a:extLst xmlns:a="http://schemas.openxmlformats.org/drawingml/2006/main">
               <a:ext uri="{FF2B5EF4-FFF2-40B4-BE49-F238E27FC236}">
-                <a16:creationId xmlns:a16="http://schemas.microsoft.com/office/drawing/2014/main" id="{5E5E4F18-5108-4B88-A153-33BE836225BE}"/>
+                <a16:creationId xmlns:a16="http://schemas.microsoft.com/office/drawing/2014/main" id="{0285AB4A-69AB-461E-BCBA-E8C6C1EA4C12}"/>
               </a:ext>
             </a:extLst>
           </p:cNvPr>
@@ -7893,7 +7893,7 @@
           <p:cNvPr id="4" name="">
             <a:extLst xmlns:a="http://schemas.openxmlformats.org/drawingml/2006/main">
               <a:ext uri="{FF2B5EF4-FFF2-40B4-BE49-F238E27FC236}">
-                <a16:creationId xmlns:a16="http://schemas.microsoft.com/office/drawing/2014/main" id="{292E56A5-CF5C-4B91-999A-04029E22B3DE}"/>
+                <a16:creationId xmlns:a16="http://schemas.microsoft.com/office/drawing/2014/main" id="{5A87FFFA-6012-42D4-805E-48B83CD60917}"/>
               </a:ext>
             </a:extLst>
           </p:cNvPr>
@@ -7950,7 +7950,7 @@
           <p:cNvPr id="5" name="">
             <a:extLst xmlns:a="http://schemas.openxmlformats.org/drawingml/2006/main">
               <a:ext uri="{FF2B5EF4-FFF2-40B4-BE49-F238E27FC236}">
-                <a16:creationId xmlns:a16="http://schemas.microsoft.com/office/drawing/2014/main" id="{983D5235-690B-4234-9CF0-5A9762133068}"/>
+                <a16:creationId xmlns:a16="http://schemas.microsoft.com/office/drawing/2014/main" id="{CFD00A56-3834-44AB-AF33-2309379828D5}"/>
               </a:ext>
             </a:extLst>
           </p:cNvPr>
@@ -8007,7 +8007,7 @@
           <p:cNvPr id="6" name="">
             <a:extLst xmlns:a="http://schemas.openxmlformats.org/drawingml/2006/main">
               <a:ext uri="{FF2B5EF4-FFF2-40B4-BE49-F238E27FC236}">
-                <a16:creationId xmlns:a16="http://schemas.microsoft.com/office/drawing/2014/main" id="{96199732-A348-4773-A356-ECBAD3FA3F96}"/>
+                <a16:creationId xmlns:a16="http://schemas.microsoft.com/office/drawing/2014/main" id="{E7AE7CA3-A894-436A-A882-800C7C7180A9}"/>
               </a:ext>
             </a:extLst>
           </p:cNvPr>
@@ -8064,7 +8064,7 @@
           <p:cNvPr id="7" name="">
             <a:extLst xmlns:a="http://schemas.openxmlformats.org/drawingml/2006/main">
               <a:ext uri="{FF2B5EF4-FFF2-40B4-BE49-F238E27FC236}">
-                <a16:creationId xmlns:a16="http://schemas.microsoft.com/office/drawing/2014/main" id="{59BBB4E2-3334-498B-9833-A6AFDD1DE454}"/>
+                <a16:creationId xmlns:a16="http://schemas.microsoft.com/office/drawing/2014/main" id="{525C246C-8E10-487C-A319-CD6EE30D21FA}"/>
               </a:ext>
             </a:extLst>
           </p:cNvPr>
@@ -8096,7 +8096,7 @@
           <p:cNvPr id="8" name="">
             <a:extLst xmlns:a="http://schemas.openxmlformats.org/drawingml/2006/main">
               <a:ext uri="{FF2B5EF4-FFF2-40B4-BE49-F238E27FC236}">
-                <a16:creationId xmlns:a16="http://schemas.microsoft.com/office/drawing/2014/main" id="{2408E5B9-92D0-4AFD-8F4B-7B722A4FBFEE}"/>
+                <a16:creationId xmlns:a16="http://schemas.microsoft.com/office/drawing/2014/main" id="{35352181-B3E7-4887-BEE2-75252A8C0A74}"/>
               </a:ext>
             </a:extLst>
           </p:cNvPr>
@@ -8153,7 +8153,7 @@
           <p:cNvPr id="9" name="">
             <a:extLst xmlns:a="http://schemas.openxmlformats.org/drawingml/2006/main">
               <a:ext uri="{FF2B5EF4-FFF2-40B4-BE49-F238E27FC236}">
-                <a16:creationId xmlns:a16="http://schemas.microsoft.com/office/drawing/2014/main" id="{CC2F12B6-9449-4F68-AE1B-D711D8AA554C}"/>
+                <a16:creationId xmlns:a16="http://schemas.microsoft.com/office/drawing/2014/main" id="{34F46489-F933-4EEA-BC42-66E2A54A4FBD}"/>
               </a:ext>
             </a:extLst>
           </p:cNvPr>
@@ -8210,19 +8210,19 @@
           <p:cNvPr id="10" name="">
             <a:extLst xmlns:a="http://schemas.openxmlformats.org/drawingml/2006/main">
               <a:ext uri="{FF2B5EF4-FFF2-40B4-BE49-F238E27FC236}">
-                <a16:creationId xmlns:a16="http://schemas.microsoft.com/office/drawing/2014/main" id="{B0992C86-DB7B-4B24-95CF-754F8D8CE44A}"/>
-              </a:ext>
-            </a:extLst>
-          </p:cNvPr>
-          <p:cNvSpPr>
-            <a:spLocks xmlns:a="http://schemas.openxmlformats.org/drawingml/2006/main" noGrp="1"/>
-          </p:cNvSpPr>
-          <p:nvPr/>
-        </p:nvSpPr>
-        <p:spPr>
-          <a:xfrm xmlns:a="http://schemas.openxmlformats.org/drawingml/2006/main">
-            <a:off x="914400" y="1257300"/>
-            <a:ext cx="10363200" cy="781050"/>
+                <a16:creationId xmlns:a16="http://schemas.microsoft.com/office/drawing/2014/main" id="{EE6455DB-FCCB-49BB-8ECB-14DC58B978DC}"/>
+              </a:ext>
+            </a:extLst>
+          </p:cNvPr>
+          <p:cNvSpPr>
+            <a:spLocks xmlns:a="http://schemas.openxmlformats.org/drawingml/2006/main" noGrp="1"/>
+          </p:cNvSpPr>
+          <p:nvPr/>
+        </p:nvSpPr>
+        <p:spPr>
+          <a:xfrm xmlns:a="http://schemas.openxmlformats.org/drawingml/2006/main">
+            <a:off x="857250" y="1219200"/>
+            <a:ext cx="10477500" cy="742950"/>
           </a:xfrm>
           <a:prstGeom xmlns:a="http://schemas.openxmlformats.org/drawingml/2006/main" prst="rect">
             <a:avLst/>
@@ -8239,7 +8239,7 @@
           <a:lstStyle xmlns:a="http://schemas.openxmlformats.org/drawingml/2006/main"/>
           <a:p xmlns:a="http://schemas.openxmlformats.org/drawingml/2006/main">
             <a:pPr algn="ctr">
-              <a:defRPr sz="2175" b="1">
+              <a:defRPr sz="2100" b="1">
                 <a:solidFill>
                   <a:srgbClr val="17253A"/>
                 </a:solidFill>
@@ -8249,7 +8249,7 @@
               </a:defRPr>
             </a:pPr>
             <a:r>
-              <a:rPr sz="2175" b="1">
+              <a:rPr sz="2100" b="1">
                 <a:solidFill>
                   <a:srgbClr val="17253A"/>
                 </a:solidFill>
@@ -8267,28 +8267,30 @@
           <p:cNvPr id="11" name="">
             <a:extLst xmlns:a="http://schemas.openxmlformats.org/drawingml/2006/main">
               <a:ext uri="{FF2B5EF4-FFF2-40B4-BE49-F238E27FC236}">
-                <a16:creationId xmlns:a16="http://schemas.microsoft.com/office/drawing/2014/main" id="{3A5A6C70-4D1A-4AE2-8059-14ABD9D97A9F}"/>
-              </a:ext>
-            </a:extLst>
-          </p:cNvPr>
-          <p:cNvSpPr>
-            <a:spLocks xmlns:a="http://schemas.openxmlformats.org/drawingml/2006/main" noGrp="1"/>
-          </p:cNvSpPr>
-          <p:nvPr/>
-        </p:nvSpPr>
-        <p:spPr>
-          <a:xfrm xmlns:a="http://schemas.openxmlformats.org/drawingml/2006/main">
-            <a:off x="1000125" y="2247900"/>
-            <a:ext cx="476250" cy="476250"/>
-          </a:xfrm>
-          <a:prstGeom xmlns:a="http://schemas.openxmlformats.org/drawingml/2006/main" prst="ellipse">
+                <a16:creationId xmlns:a16="http://schemas.microsoft.com/office/drawing/2014/main" id="{F74A5B34-7A7D-411E-905A-DF1553DD724E}"/>
+              </a:ext>
+            </a:extLst>
+          </p:cNvPr>
+          <p:cNvSpPr>
+            <a:spLocks xmlns:a="http://schemas.openxmlformats.org/drawingml/2006/main" noGrp="1"/>
+          </p:cNvSpPr>
+          <p:nvPr/>
+        </p:nvSpPr>
+        <p:spPr>
+          <a:xfrm xmlns:a="http://schemas.openxmlformats.org/drawingml/2006/main">
+            <a:off x="971550" y="2124075"/>
+            <a:ext cx="38100" cy="3524250"/>
+          </a:xfrm>
+          <a:prstGeom xmlns:a="http://schemas.openxmlformats.org/drawingml/2006/main" prst="rect">
             <a:avLst/>
           </a:prstGeom>
           <a:solidFill xmlns:a="http://schemas.openxmlformats.org/drawingml/2006/main">
-            <a:srgbClr val="18324A"/>
+            <a:srgbClr val="2C6E73"/>
           </a:solidFill>
           <a:ln xmlns:a="http://schemas.openxmlformats.org/drawingml/2006/main" w="0">
-            <a:noFill/>
+            <a:solidFill>
+              <a:srgbClr val="2C6E73"/>
+            </a:solidFill>
           </a:ln>
         </p:spPr>
       </p:sp>
@@ -8297,19 +8299,19 @@
           <p:cNvPr id="12" name="">
             <a:extLst xmlns:a="http://schemas.openxmlformats.org/drawingml/2006/main">
               <a:ext uri="{FF2B5EF4-FFF2-40B4-BE49-F238E27FC236}">
-                <a16:creationId xmlns:a16="http://schemas.microsoft.com/office/drawing/2014/main" id="{89DC8C20-28FD-407D-9F8E-E94A5F27E3A8}"/>
-              </a:ext>
-            </a:extLst>
-          </p:cNvPr>
-          <p:cNvSpPr>
-            <a:spLocks xmlns:a="http://schemas.openxmlformats.org/drawingml/2006/main" noGrp="1"/>
-          </p:cNvSpPr>
-          <p:nvPr/>
-        </p:nvSpPr>
-        <p:spPr>
-          <a:xfrm xmlns:a="http://schemas.openxmlformats.org/drawingml/2006/main">
-            <a:off x="1000125" y="2276475"/>
-            <a:ext cx="476250" cy="419100"/>
+                <a16:creationId xmlns:a16="http://schemas.microsoft.com/office/drawing/2014/main" id="{FCA8BCE4-BBE4-4196-96D4-D325302A7E30}"/>
+              </a:ext>
+            </a:extLst>
+          </p:cNvPr>
+          <p:cNvSpPr>
+            <a:spLocks xmlns:a="http://schemas.openxmlformats.org/drawingml/2006/main" noGrp="1"/>
+          </p:cNvSpPr>
+          <p:nvPr/>
+        </p:nvSpPr>
+        <p:spPr>
+          <a:xfrm xmlns:a="http://schemas.openxmlformats.org/drawingml/2006/main">
+            <a:off x="1162050" y="2200275"/>
+            <a:ext cx="400050" cy="400050"/>
           </a:xfrm>
           <a:prstGeom xmlns:a="http://schemas.openxmlformats.org/drawingml/2006/main" prst="rect">
             <a:avLst/>
@@ -8326,9 +8328,9 @@
           <a:lstStyle xmlns:a="http://schemas.openxmlformats.org/drawingml/2006/main"/>
           <a:p xmlns:a="http://schemas.openxmlformats.org/drawingml/2006/main">
             <a:pPr algn="ctr">
-              <a:defRPr sz="1350" b="1">
-                <a:solidFill>
-                  <a:srgbClr val="FFFFFF"/>
+              <a:defRPr sz="1125" b="1">
+                <a:solidFill>
+                  <a:srgbClr val="2C6E73"/>
                 </a:solidFill>
                 <a:latin typeface="Arial"/>
                 <a:ea typeface="Arial"/>
@@ -8336,9 +8338,9 @@
               </a:defRPr>
             </a:pPr>
             <a:r>
-              <a:rPr sz="1350" b="1">
-                <a:solidFill>
-                  <a:srgbClr val="FFFFFF"/>
+              <a:rPr sz="1125" b="1">
+                <a:solidFill>
+                  <a:srgbClr val="2C6E73"/>
                 </a:solidFill>
                 <a:latin typeface="Arial"/>
                 <a:ea typeface="Arial"/>
@@ -8354,19 +8356,19 @@
           <p:cNvPr id="13" name="">
             <a:extLst xmlns:a="http://schemas.openxmlformats.org/drawingml/2006/main">
               <a:ext uri="{FF2B5EF4-FFF2-40B4-BE49-F238E27FC236}">
-                <a16:creationId xmlns:a16="http://schemas.microsoft.com/office/drawing/2014/main" id="{FA8D7714-F87F-4ED6-937E-6F3E3AF71419}"/>
-              </a:ext>
-            </a:extLst>
-          </p:cNvPr>
-          <p:cNvSpPr>
-            <a:spLocks xmlns:a="http://schemas.openxmlformats.org/drawingml/2006/main" noGrp="1"/>
-          </p:cNvSpPr>
-          <p:nvPr/>
-        </p:nvSpPr>
-        <p:spPr>
-          <a:xfrm xmlns:a="http://schemas.openxmlformats.org/drawingml/2006/main">
-            <a:off x="1714500" y="2181225"/>
-            <a:ext cx="9429750" cy="609600"/>
+                <a16:creationId xmlns:a16="http://schemas.microsoft.com/office/drawing/2014/main" id="{31386419-7215-4F05-9F6D-3103AC31A25F}"/>
+              </a:ext>
+            </a:extLst>
+          </p:cNvPr>
+          <p:cNvSpPr>
+            <a:spLocks xmlns:a="http://schemas.openxmlformats.org/drawingml/2006/main" noGrp="1"/>
+          </p:cNvSpPr>
+          <p:nvPr/>
+        </p:nvSpPr>
+        <p:spPr>
+          <a:xfrm xmlns:a="http://schemas.openxmlformats.org/drawingml/2006/main">
+            <a:off x="1714500" y="2114550"/>
+            <a:ext cx="9525000" cy="809625"/>
           </a:xfrm>
           <a:prstGeom xmlns:a="http://schemas.openxmlformats.org/drawingml/2006/main" prst="rect">
             <a:avLst/>
@@ -8383,7 +8385,7 @@
           <a:lstStyle xmlns:a="http://schemas.openxmlformats.org/drawingml/2006/main"/>
           <a:p xmlns:a="http://schemas.openxmlformats.org/drawingml/2006/main">
             <a:pPr algn="l">
-              <a:defRPr sz="1500" b="0">
+              <a:defRPr sz="1725" b="0">
                 <a:solidFill>
                   <a:srgbClr val="17253A"/>
                 </a:solidFill>
@@ -8393,7 +8395,7 @@
               </a:defRPr>
             </a:pPr>
             <a:r>
-              <a:rPr sz="1500" b="0">
+              <a:rPr sz="1725" b="0">
                 <a:solidFill>
                   <a:srgbClr val="17253A"/>
                 </a:solidFill>
@@ -8401,7 +8403,7 @@
                 <a:ea typeface="Arial"/>
                 <a:cs typeface="Arial"/>
               </a:rPr>
-              <a:t>Identify the structure: Retrieve the relevant fact or method before answering.</a:t>
+              <a:t>7,305,019 → nearest 100,000 = 7,300,000</a:t>
             </a:r>
           </a:p>
         </p:txBody>
@@ -8411,28 +8413,30 @@
           <p:cNvPr id="14" name="">
             <a:extLst xmlns:a="http://schemas.openxmlformats.org/drawingml/2006/main">
               <a:ext uri="{FF2B5EF4-FFF2-40B4-BE49-F238E27FC236}">
-                <a16:creationId xmlns:a16="http://schemas.microsoft.com/office/drawing/2014/main" id="{0ECA26AC-67C0-49EE-B840-BB0691A222B4}"/>
-              </a:ext>
-            </a:extLst>
-          </p:cNvPr>
-          <p:cNvSpPr>
-            <a:spLocks xmlns:a="http://schemas.openxmlformats.org/drawingml/2006/main" noGrp="1"/>
-          </p:cNvSpPr>
-          <p:nvPr/>
-        </p:nvSpPr>
-        <p:spPr>
-          <a:xfrm xmlns:a="http://schemas.openxmlformats.org/drawingml/2006/main">
-            <a:off x="1000125" y="2990850"/>
-            <a:ext cx="476250" cy="476250"/>
-          </a:xfrm>
-          <a:prstGeom xmlns:a="http://schemas.openxmlformats.org/drawingml/2006/main" prst="ellipse">
+                <a16:creationId xmlns:a16="http://schemas.microsoft.com/office/drawing/2014/main" id="{8E9E15A3-A0EB-4AC9-B3D2-27B1EF31A0CF}"/>
+              </a:ext>
+            </a:extLst>
+          </p:cNvPr>
+          <p:cNvSpPr>
+            <a:spLocks xmlns:a="http://schemas.openxmlformats.org/drawingml/2006/main" noGrp="1"/>
+          </p:cNvSpPr>
+          <p:nvPr/>
+        </p:nvSpPr>
+        <p:spPr>
+          <a:xfrm xmlns:a="http://schemas.openxmlformats.org/drawingml/2006/main">
+            <a:off x="1714500" y="2943225"/>
+            <a:ext cx="9334500" cy="9525"/>
+          </a:xfrm>
+          <a:prstGeom xmlns:a="http://schemas.openxmlformats.org/drawingml/2006/main" prst="rect">
             <a:avLst/>
           </a:prstGeom>
           <a:solidFill xmlns:a="http://schemas.openxmlformats.org/drawingml/2006/main">
-            <a:srgbClr val="2C6E73"/>
+            <a:srgbClr val="D9E0E6"/>
           </a:solidFill>
           <a:ln xmlns:a="http://schemas.openxmlformats.org/drawingml/2006/main" w="0">
-            <a:noFill/>
+            <a:solidFill>
+              <a:srgbClr val="D9E0E6"/>
+            </a:solidFill>
           </a:ln>
         </p:spPr>
       </p:sp>
@@ -8441,19 +8445,19 @@
           <p:cNvPr id="15" name="">
             <a:extLst xmlns:a="http://schemas.openxmlformats.org/drawingml/2006/main">
               <a:ext uri="{FF2B5EF4-FFF2-40B4-BE49-F238E27FC236}">
-                <a16:creationId xmlns:a16="http://schemas.microsoft.com/office/drawing/2014/main" id="{FEDA2985-DAC5-4DC8-AC91-D5694E042819}"/>
-              </a:ext>
-            </a:extLst>
-          </p:cNvPr>
-          <p:cNvSpPr>
-            <a:spLocks xmlns:a="http://schemas.openxmlformats.org/drawingml/2006/main" noGrp="1"/>
-          </p:cNvSpPr>
-          <p:nvPr/>
-        </p:nvSpPr>
-        <p:spPr>
-          <a:xfrm xmlns:a="http://schemas.openxmlformats.org/drawingml/2006/main">
-            <a:off x="1000125" y="3019425"/>
-            <a:ext cx="476250" cy="419100"/>
+                <a16:creationId xmlns:a16="http://schemas.microsoft.com/office/drawing/2014/main" id="{CB2D116C-6AC6-463C-9D68-505FE67B6A78}"/>
+              </a:ext>
+            </a:extLst>
+          </p:cNvPr>
+          <p:cNvSpPr>
+            <a:spLocks xmlns:a="http://schemas.openxmlformats.org/drawingml/2006/main" noGrp="1"/>
+          </p:cNvSpPr>
+          <p:nvPr/>
+        </p:nvSpPr>
+        <p:spPr>
+          <a:xfrm xmlns:a="http://schemas.openxmlformats.org/drawingml/2006/main">
+            <a:off x="1162050" y="3076575"/>
+            <a:ext cx="400050" cy="400050"/>
           </a:xfrm>
           <a:prstGeom xmlns:a="http://schemas.openxmlformats.org/drawingml/2006/main" prst="rect">
             <a:avLst/>
@@ -8470,9 +8474,9 @@
           <a:lstStyle xmlns:a="http://schemas.openxmlformats.org/drawingml/2006/main"/>
           <a:p xmlns:a="http://schemas.openxmlformats.org/drawingml/2006/main">
             <a:pPr algn="ctr">
-              <a:defRPr sz="1350" b="1">
-                <a:solidFill>
-                  <a:srgbClr val="FFFFFF"/>
+              <a:defRPr sz="1125" b="1">
+                <a:solidFill>
+                  <a:srgbClr val="2C6E73"/>
                 </a:solidFill>
                 <a:latin typeface="Arial"/>
                 <a:ea typeface="Arial"/>
@@ -8480,9 +8484,9 @@
               </a:defRPr>
             </a:pPr>
             <a:r>
-              <a:rPr sz="1350" b="1">
-                <a:solidFill>
-                  <a:srgbClr val="FFFFFF"/>
+              <a:rPr sz="1125" b="1">
+                <a:solidFill>
+                  <a:srgbClr val="2C6E73"/>
                 </a:solidFill>
                 <a:latin typeface="Arial"/>
                 <a:ea typeface="Arial"/>
@@ -8498,19 +8502,19 @@
           <p:cNvPr id="16" name="">
             <a:extLst xmlns:a="http://schemas.openxmlformats.org/drawingml/2006/main">
               <a:ext uri="{FF2B5EF4-FFF2-40B4-BE49-F238E27FC236}">
-                <a16:creationId xmlns:a16="http://schemas.microsoft.com/office/drawing/2014/main" id="{7B355770-985A-4099-94C7-37D5931DF2EC}"/>
-              </a:ext>
-            </a:extLst>
-          </p:cNvPr>
-          <p:cNvSpPr>
-            <a:spLocks xmlns:a="http://schemas.openxmlformats.org/drawingml/2006/main" noGrp="1"/>
-          </p:cNvSpPr>
-          <p:nvPr/>
-        </p:nvSpPr>
-        <p:spPr>
-          <a:xfrm xmlns:a="http://schemas.openxmlformats.org/drawingml/2006/main">
-            <a:off x="1714500" y="2924175"/>
-            <a:ext cx="9429750" cy="609600"/>
+                <a16:creationId xmlns:a16="http://schemas.microsoft.com/office/drawing/2014/main" id="{12D75801-DBC0-4F7B-91F0-457A734FFAFB}"/>
+              </a:ext>
+            </a:extLst>
+          </p:cNvPr>
+          <p:cNvSpPr>
+            <a:spLocks xmlns:a="http://schemas.openxmlformats.org/drawingml/2006/main" noGrp="1"/>
+          </p:cNvSpPr>
+          <p:nvPr/>
+        </p:nvSpPr>
+        <p:spPr>
+          <a:xfrm xmlns:a="http://schemas.openxmlformats.org/drawingml/2006/main">
+            <a:off x="1714500" y="2990850"/>
+            <a:ext cx="9525000" cy="809625"/>
           </a:xfrm>
           <a:prstGeom xmlns:a="http://schemas.openxmlformats.org/drawingml/2006/main" prst="rect">
             <a:avLst/>
@@ -8527,7 +8531,7 @@
           <a:lstStyle xmlns:a="http://schemas.openxmlformats.org/drawingml/2006/main"/>
           <a:p xmlns:a="http://schemas.openxmlformats.org/drawingml/2006/main">
             <a:pPr algn="l">
-              <a:defRPr sz="1500" b="0">
+              <a:defRPr sz="1725" b="0">
                 <a:solidFill>
                   <a:srgbClr val="17253A"/>
                 </a:solidFill>
@@ -8537,7 +8541,7 @@
               </a:defRPr>
             </a:pPr>
             <a:r>
-              <a:rPr sz="1500" b="0">
+              <a:rPr sz="1725" b="0">
                 <a:solidFill>
                   <a:srgbClr val="17253A"/>
                 </a:solidFill>
@@ -8545,7 +8549,7 @@
                 <a:ea typeface="Arial"/>
                 <a:cs typeface="Arial"/>
               </a:rPr>
-              <a:t>Set up the method: Show a clear calculation or representation and explain the decision.</a:t>
+              <a:t>2,407 × 38 = 91,466</a:t>
             </a:r>
           </a:p>
         </p:txBody>
@@ -8555,28 +8559,30 @@
           <p:cNvPr id="17" name="">
             <a:extLst xmlns:a="http://schemas.openxmlformats.org/drawingml/2006/main">
               <a:ext uri="{FF2B5EF4-FFF2-40B4-BE49-F238E27FC236}">
-                <a16:creationId xmlns:a16="http://schemas.microsoft.com/office/drawing/2014/main" id="{960268C6-202E-46E3-A8B0-BD874FC7F605}"/>
-              </a:ext>
-            </a:extLst>
-          </p:cNvPr>
-          <p:cNvSpPr>
-            <a:spLocks xmlns:a="http://schemas.openxmlformats.org/drawingml/2006/main" noGrp="1"/>
-          </p:cNvSpPr>
-          <p:nvPr/>
-        </p:nvSpPr>
-        <p:spPr>
-          <a:xfrm xmlns:a="http://schemas.openxmlformats.org/drawingml/2006/main">
-            <a:off x="1000125" y="3733800"/>
-            <a:ext cx="476250" cy="476250"/>
-          </a:xfrm>
-          <a:prstGeom xmlns:a="http://schemas.openxmlformats.org/drawingml/2006/main" prst="ellipse">
+                <a16:creationId xmlns:a16="http://schemas.microsoft.com/office/drawing/2014/main" id="{30E127CB-98B9-4B08-873D-61E8741BC179}"/>
+              </a:ext>
+            </a:extLst>
+          </p:cNvPr>
+          <p:cNvSpPr>
+            <a:spLocks xmlns:a="http://schemas.openxmlformats.org/drawingml/2006/main" noGrp="1"/>
+          </p:cNvSpPr>
+          <p:nvPr/>
+        </p:nvSpPr>
+        <p:spPr>
+          <a:xfrm xmlns:a="http://schemas.openxmlformats.org/drawingml/2006/main">
+            <a:off x="1714500" y="3819525"/>
+            <a:ext cx="9334500" cy="9525"/>
+          </a:xfrm>
+          <a:prstGeom xmlns:a="http://schemas.openxmlformats.org/drawingml/2006/main" prst="rect">
             <a:avLst/>
           </a:prstGeom>
           <a:solidFill xmlns:a="http://schemas.openxmlformats.org/drawingml/2006/main">
-            <a:srgbClr val="2C6E73"/>
+            <a:srgbClr val="D9E0E6"/>
           </a:solidFill>
           <a:ln xmlns:a="http://schemas.openxmlformats.org/drawingml/2006/main" w="0">
-            <a:noFill/>
+            <a:solidFill>
+              <a:srgbClr val="D9E0E6"/>
+            </a:solidFill>
           </a:ln>
         </p:spPr>
       </p:sp>
@@ -8585,19 +8591,19 @@
           <p:cNvPr id="18" name="">
             <a:extLst xmlns:a="http://schemas.openxmlformats.org/drawingml/2006/main">
               <a:ext uri="{FF2B5EF4-FFF2-40B4-BE49-F238E27FC236}">
-                <a16:creationId xmlns:a16="http://schemas.microsoft.com/office/drawing/2014/main" id="{E7EDBB12-8E63-4A9A-83E3-96847C626DD4}"/>
-              </a:ext>
-            </a:extLst>
-          </p:cNvPr>
-          <p:cNvSpPr>
-            <a:spLocks xmlns:a="http://schemas.openxmlformats.org/drawingml/2006/main" noGrp="1"/>
-          </p:cNvSpPr>
-          <p:nvPr/>
-        </p:nvSpPr>
-        <p:spPr>
-          <a:xfrm xmlns:a="http://schemas.openxmlformats.org/drawingml/2006/main">
-            <a:off x="1000125" y="3762375"/>
-            <a:ext cx="476250" cy="419100"/>
+                <a16:creationId xmlns:a16="http://schemas.microsoft.com/office/drawing/2014/main" id="{59235126-7028-4049-8E84-E1C60A5061F4}"/>
+              </a:ext>
+            </a:extLst>
+          </p:cNvPr>
+          <p:cNvSpPr>
+            <a:spLocks xmlns:a="http://schemas.openxmlformats.org/drawingml/2006/main" noGrp="1"/>
+          </p:cNvSpPr>
+          <p:nvPr/>
+        </p:nvSpPr>
+        <p:spPr>
+          <a:xfrm xmlns:a="http://schemas.openxmlformats.org/drawingml/2006/main">
+            <a:off x="1162050" y="3952875"/>
+            <a:ext cx="400050" cy="400050"/>
           </a:xfrm>
           <a:prstGeom xmlns:a="http://schemas.openxmlformats.org/drawingml/2006/main" prst="rect">
             <a:avLst/>
@@ -8614,9 +8620,9 @@
           <a:lstStyle xmlns:a="http://schemas.openxmlformats.org/drawingml/2006/main"/>
           <a:p xmlns:a="http://schemas.openxmlformats.org/drawingml/2006/main">
             <a:pPr algn="ctr">
-              <a:defRPr sz="1350" b="1">
-                <a:solidFill>
-                  <a:srgbClr val="FFFFFF"/>
+              <a:defRPr sz="1125" b="1">
+                <a:solidFill>
+                  <a:srgbClr val="2C6E73"/>
                 </a:solidFill>
                 <a:latin typeface="Arial"/>
                 <a:ea typeface="Arial"/>
@@ -8624,9 +8630,9 @@
               </a:defRPr>
             </a:pPr>
             <a:r>
-              <a:rPr sz="1350" b="1">
-                <a:solidFill>
-                  <a:srgbClr val="FFFFFF"/>
+              <a:rPr sz="1125" b="1">
+                <a:solidFill>
+                  <a:srgbClr val="2C6E73"/>
                 </a:solidFill>
                 <a:latin typeface="Arial"/>
                 <a:ea typeface="Arial"/>
@@ -8642,19 +8648,19 @@
           <p:cNvPr id="19" name="">
             <a:extLst xmlns:a="http://schemas.openxmlformats.org/drawingml/2006/main">
               <a:ext uri="{FF2B5EF4-FFF2-40B4-BE49-F238E27FC236}">
-                <a16:creationId xmlns:a16="http://schemas.microsoft.com/office/drawing/2014/main" id="{F910C78C-0D80-4BE4-BF7B-BDB016F126B3}"/>
-              </a:ext>
-            </a:extLst>
-          </p:cNvPr>
-          <p:cNvSpPr>
-            <a:spLocks xmlns:a="http://schemas.openxmlformats.org/drawingml/2006/main" noGrp="1"/>
-          </p:cNvSpPr>
-          <p:nvPr/>
-        </p:nvSpPr>
-        <p:spPr>
-          <a:xfrm xmlns:a="http://schemas.openxmlformats.org/drawingml/2006/main">
-            <a:off x="1714500" y="3667125"/>
-            <a:ext cx="9429750" cy="609600"/>
+                <a16:creationId xmlns:a16="http://schemas.microsoft.com/office/drawing/2014/main" id="{619046B3-8030-48BD-9F7D-AE94FD0B2C82}"/>
+              </a:ext>
+            </a:extLst>
+          </p:cNvPr>
+          <p:cNvSpPr>
+            <a:spLocks xmlns:a="http://schemas.openxmlformats.org/drawingml/2006/main" noGrp="1"/>
+          </p:cNvSpPr>
+          <p:nvPr/>
+        </p:nvSpPr>
+        <p:spPr>
+          <a:xfrm xmlns:a="http://schemas.openxmlformats.org/drawingml/2006/main">
+            <a:off x="1714500" y="3867150"/>
+            <a:ext cx="9525000" cy="809625"/>
           </a:xfrm>
           <a:prstGeom xmlns:a="http://schemas.openxmlformats.org/drawingml/2006/main" prst="rect">
             <a:avLst/>
@@ -8671,7 +8677,7 @@
           <a:lstStyle xmlns:a="http://schemas.openxmlformats.org/drawingml/2006/main"/>
           <a:p xmlns:a="http://schemas.openxmlformats.org/drawingml/2006/main">
             <a:pPr algn="l">
-              <a:defRPr sz="1500" b="0">
+              <a:defRPr sz="1725" b="0">
                 <a:solidFill>
                   <a:srgbClr val="17253A"/>
                 </a:solidFill>
@@ -8681,7 +8687,7 @@
               </a:defRPr>
             </a:pPr>
             <a:r>
-              <a:rPr sz="1500" b="0">
+              <a:rPr sz="1725" b="0">
                 <a:solidFill>
                   <a:srgbClr val="17253A"/>
                 </a:solidFill>
@@ -8689,7 +8695,7 @@
                 <a:ea typeface="Arial"/>
                 <a:cs typeface="Arial"/>
               </a:rPr>
-              <a:t>Complete the calculation: 7,300,000; 91,466; 288.</a:t>
+              <a:t>7,488 ÷ 26 = 288</a:t>
             </a:r>
           </a:p>
         </p:txBody>
@@ -8699,28 +8705,30 @@
           <p:cNvPr id="20" name="">
             <a:extLst xmlns:a="http://schemas.openxmlformats.org/drawingml/2006/main">
               <a:ext uri="{FF2B5EF4-FFF2-40B4-BE49-F238E27FC236}">
-                <a16:creationId xmlns:a16="http://schemas.microsoft.com/office/drawing/2014/main" id="{6C0D7E41-F31E-419A-B530-ECE0954943F0}"/>
-              </a:ext>
-            </a:extLst>
-          </p:cNvPr>
-          <p:cNvSpPr>
-            <a:spLocks xmlns:a="http://schemas.openxmlformats.org/drawingml/2006/main" noGrp="1"/>
-          </p:cNvSpPr>
-          <p:nvPr/>
-        </p:nvSpPr>
-        <p:spPr>
-          <a:xfrm xmlns:a="http://schemas.openxmlformats.org/drawingml/2006/main">
-            <a:off x="1000125" y="4476750"/>
-            <a:ext cx="476250" cy="476250"/>
-          </a:xfrm>
-          <a:prstGeom xmlns:a="http://schemas.openxmlformats.org/drawingml/2006/main" prst="ellipse">
+                <a16:creationId xmlns:a16="http://schemas.microsoft.com/office/drawing/2014/main" id="{42583578-BE4A-473B-94A1-F06933E8A634}"/>
+              </a:ext>
+            </a:extLst>
+          </p:cNvPr>
+          <p:cNvSpPr>
+            <a:spLocks xmlns:a="http://schemas.openxmlformats.org/drawingml/2006/main" noGrp="1"/>
+          </p:cNvSpPr>
+          <p:nvPr/>
+        </p:nvSpPr>
+        <p:spPr>
+          <a:xfrm xmlns:a="http://schemas.openxmlformats.org/drawingml/2006/main">
+            <a:off x="1714500" y="4695825"/>
+            <a:ext cx="9334500" cy="9525"/>
+          </a:xfrm>
+          <a:prstGeom xmlns:a="http://schemas.openxmlformats.org/drawingml/2006/main" prst="rect">
             <a:avLst/>
           </a:prstGeom>
           <a:solidFill xmlns:a="http://schemas.openxmlformats.org/drawingml/2006/main">
-            <a:srgbClr val="2C6E73"/>
+            <a:srgbClr val="D9E0E6"/>
           </a:solidFill>
           <a:ln xmlns:a="http://schemas.openxmlformats.org/drawingml/2006/main" w="0">
-            <a:noFill/>
+            <a:solidFill>
+              <a:srgbClr val="D9E0E6"/>
+            </a:solidFill>
           </a:ln>
         </p:spPr>
       </p:sp>
@@ -8729,19 +8737,19 @@
           <p:cNvPr id="21" name="">
             <a:extLst xmlns:a="http://schemas.openxmlformats.org/drawingml/2006/main">
               <a:ext uri="{FF2B5EF4-FFF2-40B4-BE49-F238E27FC236}">
-                <a16:creationId xmlns:a16="http://schemas.microsoft.com/office/drawing/2014/main" id="{FBB9A996-22A0-4C99-86E2-62C27C14DC06}"/>
-              </a:ext>
-            </a:extLst>
-          </p:cNvPr>
-          <p:cNvSpPr>
-            <a:spLocks xmlns:a="http://schemas.openxmlformats.org/drawingml/2006/main" noGrp="1"/>
-          </p:cNvSpPr>
-          <p:nvPr/>
-        </p:nvSpPr>
-        <p:spPr>
-          <a:xfrm xmlns:a="http://schemas.openxmlformats.org/drawingml/2006/main">
-            <a:off x="1000125" y="4505325"/>
-            <a:ext cx="476250" cy="419100"/>
+                <a16:creationId xmlns:a16="http://schemas.microsoft.com/office/drawing/2014/main" id="{15CCFBC3-556E-42F6-8CEB-0D043999A285}"/>
+              </a:ext>
+            </a:extLst>
+          </p:cNvPr>
+          <p:cNvSpPr>
+            <a:spLocks xmlns:a="http://schemas.openxmlformats.org/drawingml/2006/main" noGrp="1"/>
+          </p:cNvSpPr>
+          <p:nvPr/>
+        </p:nvSpPr>
+        <p:spPr>
+          <a:xfrm xmlns:a="http://schemas.openxmlformats.org/drawingml/2006/main">
+            <a:off x="1162050" y="4829175"/>
+            <a:ext cx="400050" cy="400050"/>
           </a:xfrm>
           <a:prstGeom xmlns:a="http://schemas.openxmlformats.org/drawingml/2006/main" prst="rect">
             <a:avLst/>
@@ -8758,9 +8766,9 @@
           <a:lstStyle xmlns:a="http://schemas.openxmlformats.org/drawingml/2006/main"/>
           <a:p xmlns:a="http://schemas.openxmlformats.org/drawingml/2006/main">
             <a:pPr algn="ctr">
-              <a:defRPr sz="1350" b="1">
-                <a:solidFill>
-                  <a:srgbClr val="FFFFFF"/>
+              <a:defRPr sz="1125" b="1">
+                <a:solidFill>
+                  <a:srgbClr val="2F785D"/>
                 </a:solidFill>
                 <a:latin typeface="Arial"/>
                 <a:ea typeface="Arial"/>
@@ -8768,9 +8776,9 @@
               </a:defRPr>
             </a:pPr>
             <a:r>
-              <a:rPr sz="1350" b="1">
-                <a:solidFill>
-                  <a:srgbClr val="FFFFFF"/>
+              <a:rPr sz="1125" b="1">
+                <a:solidFill>
+                  <a:srgbClr val="2F785D"/>
                 </a:solidFill>
                 <a:latin typeface="Arial"/>
                 <a:ea typeface="Arial"/>
@@ -8786,19 +8794,19 @@
           <p:cNvPr id="22" name="">
             <a:extLst xmlns:a="http://schemas.openxmlformats.org/drawingml/2006/main">
               <a:ext uri="{FF2B5EF4-FFF2-40B4-BE49-F238E27FC236}">
-                <a16:creationId xmlns:a16="http://schemas.microsoft.com/office/drawing/2014/main" id="{A3AC062C-AF37-4234-8A51-29651849EA5A}"/>
-              </a:ext>
-            </a:extLst>
-          </p:cNvPr>
-          <p:cNvSpPr>
-            <a:spLocks xmlns:a="http://schemas.openxmlformats.org/drawingml/2006/main" noGrp="1"/>
-          </p:cNvSpPr>
-          <p:nvPr/>
-        </p:nvSpPr>
-        <p:spPr>
-          <a:xfrm xmlns:a="http://schemas.openxmlformats.org/drawingml/2006/main">
-            <a:off x="1714500" y="4410075"/>
-            <a:ext cx="9429750" cy="609600"/>
+                <a16:creationId xmlns:a16="http://schemas.microsoft.com/office/drawing/2014/main" id="{B446B297-7599-43B8-B92E-34C9309F01FA}"/>
+              </a:ext>
+            </a:extLst>
+          </p:cNvPr>
+          <p:cNvSpPr>
+            <a:spLocks xmlns:a="http://schemas.openxmlformats.org/drawingml/2006/main" noGrp="1"/>
+          </p:cNvSpPr>
+          <p:nvPr/>
+        </p:nvSpPr>
+        <p:spPr>
+          <a:xfrm xmlns:a="http://schemas.openxmlformats.org/drawingml/2006/main">
+            <a:off x="1714500" y="4743450"/>
+            <a:ext cx="9525000" cy="809625"/>
           </a:xfrm>
           <a:prstGeom xmlns:a="http://schemas.openxmlformats.org/drawingml/2006/main" prst="rect">
             <a:avLst/>
@@ -8815,7 +8823,7 @@
           <a:lstStyle xmlns:a="http://schemas.openxmlformats.org/drawingml/2006/main"/>
           <a:p xmlns:a="http://schemas.openxmlformats.org/drawingml/2006/main">
             <a:pPr algn="l">
-              <a:defRPr sz="1500" b="1">
+              <a:defRPr sz="1725" b="1">
                 <a:solidFill>
                   <a:srgbClr val="2F785D"/>
                 </a:solidFill>
@@ -8825,7 +8833,7 @@
               </a:defRPr>
             </a:pPr>
             <a:r>
-              <a:rPr sz="1500" b="1">
+              <a:rPr sz="1725" b="1">
                 <a:solidFill>
                   <a:srgbClr val="2F785D"/>
                 </a:solidFill>
@@ -8833,7 +8841,7 @@
                 <a:ea typeface="Arial"/>
                 <a:cs typeface="Arial"/>
               </a:rPr>
-              <a:t>Check the result: Check the result, identify any misconception and record the next step.</a:t>
+              <a:t>Check each answer with estimation or an inverse</a:t>
             </a:r>
           </a:p>
         </p:txBody>
@@ -8841,7 +8849,7 @@
     </p:spTree>
     <p:extLst>
       <p:ext uri="{BB962C8B-B14F-4D97-AF65-F5344CB8AC3E}">
-        <p14:creationId xmlns:p14="http://schemas.microsoft.com/office/powerpoint/2010/main" val="1851849201"/>
+        <p14:creationId xmlns:p14="http://schemas.microsoft.com/office/powerpoint/2010/main" val="1052712313"/>
       </p:ext>
     </p:extLst>
   </p:cSld>
@@ -9134,7 +9142,7 @@
           <p:cNvPr id="15" name="">
             <a:extLst xmlns:a="http://schemas.openxmlformats.org/drawingml/2006/main">
               <a:ext uri="{FF2B5EF4-FFF2-40B4-BE49-F238E27FC236}">
-                <a16:creationId xmlns:a16="http://schemas.microsoft.com/office/drawing/2014/main" id="{7CF229B4-ED5D-414C-AE27-63C8F3D2A86B}"/>
+                <a16:creationId xmlns:a16="http://schemas.microsoft.com/office/drawing/2014/main" id="{532B9635-A0B4-4892-B000-A9C9110E73B9}"/>
               </a:ext>
             </a:extLst>
           </p:cNvPr>
@@ -9166,7 +9174,7 @@
           <p:cNvPr id="2" name="">
             <a:extLst xmlns:a="http://schemas.openxmlformats.org/drawingml/2006/main">
               <a:ext uri="{FF2B5EF4-FFF2-40B4-BE49-F238E27FC236}">
-                <a16:creationId xmlns:a16="http://schemas.microsoft.com/office/drawing/2014/main" id="{FAFEBB74-64CC-495F-A0B0-8E684CA44F3F}"/>
+                <a16:creationId xmlns:a16="http://schemas.microsoft.com/office/drawing/2014/main" id="{FA87B0AE-CD81-4655-BC6C-59DE7195A41E}"/>
               </a:ext>
             </a:extLst>
           </p:cNvPr>
@@ -9223,7 +9231,7 @@
           <p:cNvPr id="3" name="">
             <a:extLst xmlns:a="http://schemas.openxmlformats.org/drawingml/2006/main">
               <a:ext uri="{FF2B5EF4-FFF2-40B4-BE49-F238E27FC236}">
-                <a16:creationId xmlns:a16="http://schemas.microsoft.com/office/drawing/2014/main" id="{9FB3C29A-AD16-4A61-A48B-54729E5459A7}"/>
+                <a16:creationId xmlns:a16="http://schemas.microsoft.com/office/drawing/2014/main" id="{BC100086-B5E0-49C1-A9D7-D121E3D91F38}"/>
               </a:ext>
             </a:extLst>
           </p:cNvPr>
@@ -9255,7 +9263,7 @@
           <p:cNvPr id="4" name="">
             <a:extLst xmlns:a="http://schemas.openxmlformats.org/drawingml/2006/main">
               <a:ext uri="{FF2B5EF4-FFF2-40B4-BE49-F238E27FC236}">
-                <a16:creationId xmlns:a16="http://schemas.microsoft.com/office/drawing/2014/main" id="{4B5F5407-1827-4AB1-BFE0-01DD3A0F6828}"/>
+                <a16:creationId xmlns:a16="http://schemas.microsoft.com/office/drawing/2014/main" id="{0CA39755-DD89-4824-B98C-470005BBFCE9}"/>
               </a:ext>
             </a:extLst>
           </p:cNvPr>
@@ -9312,7 +9320,7 @@
           <p:cNvPr id="5" name="">
             <a:extLst xmlns:a="http://schemas.openxmlformats.org/drawingml/2006/main">
               <a:ext uri="{FF2B5EF4-FFF2-40B4-BE49-F238E27FC236}">
-                <a16:creationId xmlns:a16="http://schemas.microsoft.com/office/drawing/2014/main" id="{D23967FF-1B84-45EC-A905-1FAE3CE1323D}"/>
+                <a16:creationId xmlns:a16="http://schemas.microsoft.com/office/drawing/2014/main" id="{F9C3BEC3-42AD-495E-A606-2DE465AC4A16}"/>
               </a:ext>
             </a:extLst>
           </p:cNvPr>
@@ -9369,7 +9377,7 @@
           <p:cNvPr id="6" name="">
             <a:extLst xmlns:a="http://schemas.openxmlformats.org/drawingml/2006/main">
               <a:ext uri="{FF2B5EF4-FFF2-40B4-BE49-F238E27FC236}">
-                <a16:creationId xmlns:a16="http://schemas.microsoft.com/office/drawing/2014/main" id="{BB199DA7-A857-4263-808D-8EA5F5D835C8}"/>
+                <a16:creationId xmlns:a16="http://schemas.microsoft.com/office/drawing/2014/main" id="{E30A3C4A-10AD-476F-ACBB-E3B3BFF4EEF8}"/>
               </a:ext>
             </a:extLst>
           </p:cNvPr>
@@ -9426,7 +9434,7 @@
           <p:cNvPr id="7" name="">
             <a:extLst xmlns:a="http://schemas.openxmlformats.org/drawingml/2006/main">
               <a:ext uri="{FF2B5EF4-FFF2-40B4-BE49-F238E27FC236}">
-                <a16:creationId xmlns:a16="http://schemas.microsoft.com/office/drawing/2014/main" id="{92FD5F3C-E7F0-4E01-989E-74730062F62C}"/>
+                <a16:creationId xmlns:a16="http://schemas.microsoft.com/office/drawing/2014/main" id="{B1FA9F30-B418-471A-BCCE-871F6A5C670C}"/>
               </a:ext>
             </a:extLst>
           </p:cNvPr>
@@ -9458,7 +9466,7 @@
           <p:cNvPr id="8" name="">
             <a:extLst xmlns:a="http://schemas.openxmlformats.org/drawingml/2006/main">
               <a:ext uri="{FF2B5EF4-FFF2-40B4-BE49-F238E27FC236}">
-                <a16:creationId xmlns:a16="http://schemas.microsoft.com/office/drawing/2014/main" id="{58AF44F1-01A6-4BE4-B46D-7B59CBC716B5}"/>
+                <a16:creationId xmlns:a16="http://schemas.microsoft.com/office/drawing/2014/main" id="{5FA746CD-0481-4F1D-B8F9-EDE806D706D7}"/>
               </a:ext>
             </a:extLst>
           </p:cNvPr>
@@ -9515,7 +9523,7 @@
           <p:cNvPr id="9" name="">
             <a:extLst xmlns:a="http://schemas.openxmlformats.org/drawingml/2006/main">
               <a:ext uri="{FF2B5EF4-FFF2-40B4-BE49-F238E27FC236}">
-                <a16:creationId xmlns:a16="http://schemas.microsoft.com/office/drawing/2014/main" id="{FC3B9EBC-BEB2-4F84-A759-047ED4857E50}"/>
+                <a16:creationId xmlns:a16="http://schemas.microsoft.com/office/drawing/2014/main" id="{674CCCBC-83CF-4684-A67C-DA2B28B6D17C}"/>
               </a:ext>
             </a:extLst>
           </p:cNvPr>
@@ -9572,7 +9580,7 @@
           <p:cNvPr id="10" name="">
             <a:extLst xmlns:a="http://schemas.openxmlformats.org/drawingml/2006/main">
               <a:ext uri="{FF2B5EF4-FFF2-40B4-BE49-F238E27FC236}">
-                <a16:creationId xmlns:a16="http://schemas.microsoft.com/office/drawing/2014/main" id="{60216866-CAE7-4DC5-90BF-C10ED3E6AB20}"/>
+                <a16:creationId xmlns:a16="http://schemas.microsoft.com/office/drawing/2014/main" id="{0687A7B6-FCAF-46DF-81DF-6F9CC52C2D46}"/>
               </a:ext>
             </a:extLst>
           </p:cNvPr>
@@ -9629,7 +9637,7 @@
           <p:cNvPr id="11" name="">
             <a:extLst xmlns:a="http://schemas.openxmlformats.org/drawingml/2006/main">
               <a:ext uri="{FF2B5EF4-FFF2-40B4-BE49-F238E27FC236}">
-                <a16:creationId xmlns:a16="http://schemas.microsoft.com/office/drawing/2014/main" id="{DC3C7A1F-016A-4480-B4CE-3FCF1D616568}"/>
+                <a16:creationId xmlns:a16="http://schemas.microsoft.com/office/drawing/2014/main" id="{2BACB9C4-0319-4F7F-BE98-476CDE27C328}"/>
               </a:ext>
             </a:extLst>
           </p:cNvPr>
@@ -9686,7 +9694,7 @@
           <p:cNvPr id="12" name="">
             <a:extLst xmlns:a="http://schemas.openxmlformats.org/drawingml/2006/main">
               <a:ext uri="{FF2B5EF4-FFF2-40B4-BE49-F238E27FC236}">
-                <a16:creationId xmlns:a16="http://schemas.microsoft.com/office/drawing/2014/main" id="{1F5348C6-95B4-43FE-946D-083B597DF59D}"/>
+                <a16:creationId xmlns:a16="http://schemas.microsoft.com/office/drawing/2014/main" id="{C7C94957-1A03-4F52-914B-150DD5D64156}"/>
               </a:ext>
             </a:extLst>
           </p:cNvPr>
@@ -9718,7 +9726,7 @@
           <p:cNvPr id="13" name="">
             <a:extLst xmlns:a="http://schemas.openxmlformats.org/drawingml/2006/main">
               <a:ext uri="{FF2B5EF4-FFF2-40B4-BE49-F238E27FC236}">
-                <a16:creationId xmlns:a16="http://schemas.microsoft.com/office/drawing/2014/main" id="{B852607F-DA57-4C46-B07B-46106E400173}"/>
+                <a16:creationId xmlns:a16="http://schemas.microsoft.com/office/drawing/2014/main" id="{76642CBF-1106-4B9D-8898-CDF98D74F235}"/>
               </a:ext>
             </a:extLst>
           </p:cNvPr>
@@ -9775,7 +9783,7 @@
           <p:cNvPr id="14" name="">
             <a:extLst xmlns:a="http://schemas.openxmlformats.org/drawingml/2006/main">
               <a:ext uri="{FF2B5EF4-FFF2-40B4-BE49-F238E27FC236}">
-                <a16:creationId xmlns:a16="http://schemas.microsoft.com/office/drawing/2014/main" id="{054980D5-CA92-4C64-9BF7-79BB7245124C}"/>
+                <a16:creationId xmlns:a16="http://schemas.microsoft.com/office/drawing/2014/main" id="{96C71A40-5378-4B71-8151-B16C0C5E7333}"/>
               </a:ext>
             </a:extLst>
           </p:cNvPr>
@@ -9830,7 +9838,7 @@
     </p:spTree>
     <p:extLst>
       <p:ext uri="{BB962C8B-B14F-4D97-AF65-F5344CB8AC3E}">
-        <p14:creationId xmlns:p14="http://schemas.microsoft.com/office/powerpoint/2010/main" val="4139873"/>
+        <p14:creationId xmlns:p14="http://schemas.microsoft.com/office/powerpoint/2010/main" val="1402745357"/>
       </p:ext>
     </p:extLst>
   </p:cSld>
@@ -10031,7 +10039,7 @@
           <p:cNvPr id="16" name="">
             <a:extLst xmlns:a="http://schemas.openxmlformats.org/drawingml/2006/main">
               <a:ext uri="{FF2B5EF4-FFF2-40B4-BE49-F238E27FC236}">
-                <a16:creationId xmlns:a16="http://schemas.microsoft.com/office/drawing/2014/main" id="{83C8F842-488D-447A-84FE-26005DD12A00}"/>
+                <a16:creationId xmlns:a16="http://schemas.microsoft.com/office/drawing/2014/main" id="{9F163519-51E0-436F-A572-0E192CC9B7FD}"/>
               </a:ext>
             </a:extLst>
           </p:cNvPr>
@@ -10063,7 +10071,7 @@
           <p:cNvPr id="2" name="">
             <a:extLst xmlns:a="http://schemas.openxmlformats.org/drawingml/2006/main">
               <a:ext uri="{FF2B5EF4-FFF2-40B4-BE49-F238E27FC236}">
-                <a16:creationId xmlns:a16="http://schemas.microsoft.com/office/drawing/2014/main" id="{8E724FAC-0E78-498C-89D8-235EF027F0BC}"/>
+                <a16:creationId xmlns:a16="http://schemas.microsoft.com/office/drawing/2014/main" id="{32EA2E2B-03D4-44E2-8128-3339A9F06E24}"/>
               </a:ext>
             </a:extLst>
           </p:cNvPr>
@@ -10120,7 +10128,7 @@
           <p:cNvPr id="3" name="">
             <a:extLst xmlns:a="http://schemas.openxmlformats.org/drawingml/2006/main">
               <a:ext uri="{FF2B5EF4-FFF2-40B4-BE49-F238E27FC236}">
-                <a16:creationId xmlns:a16="http://schemas.microsoft.com/office/drawing/2014/main" id="{E3874A01-9B41-411E-86D8-CBF1BF1829A5}"/>
+                <a16:creationId xmlns:a16="http://schemas.microsoft.com/office/drawing/2014/main" id="{757A57DE-E382-431A-B659-F78B88A2A2DC}"/>
               </a:ext>
             </a:extLst>
           </p:cNvPr>
@@ -10152,7 +10160,7 @@
           <p:cNvPr id="4" name="">
             <a:extLst xmlns:a="http://schemas.openxmlformats.org/drawingml/2006/main">
               <a:ext uri="{FF2B5EF4-FFF2-40B4-BE49-F238E27FC236}">
-                <a16:creationId xmlns:a16="http://schemas.microsoft.com/office/drawing/2014/main" id="{567D1A75-F776-4250-A5FA-3B650C678879}"/>
+                <a16:creationId xmlns:a16="http://schemas.microsoft.com/office/drawing/2014/main" id="{025C45CC-E427-4FA6-93B9-F5E3F1C8302A}"/>
               </a:ext>
             </a:extLst>
           </p:cNvPr>
@@ -10209,7 +10217,7 @@
           <p:cNvPr id="5" name="">
             <a:extLst xmlns:a="http://schemas.openxmlformats.org/drawingml/2006/main">
               <a:ext uri="{FF2B5EF4-FFF2-40B4-BE49-F238E27FC236}">
-                <a16:creationId xmlns:a16="http://schemas.microsoft.com/office/drawing/2014/main" id="{CE15D832-3B70-458C-8754-A660FDBC25C6}"/>
+                <a16:creationId xmlns:a16="http://schemas.microsoft.com/office/drawing/2014/main" id="{68F7F5D6-45A2-4F42-A901-A9632F7C7879}"/>
               </a:ext>
             </a:extLst>
           </p:cNvPr>
@@ -10266,7 +10274,7 @@
           <p:cNvPr id="6" name="">
             <a:extLst xmlns:a="http://schemas.openxmlformats.org/drawingml/2006/main">
               <a:ext uri="{FF2B5EF4-FFF2-40B4-BE49-F238E27FC236}">
-                <a16:creationId xmlns:a16="http://schemas.microsoft.com/office/drawing/2014/main" id="{32CE9561-4F35-4D14-891A-B074B2A67847}"/>
+                <a16:creationId xmlns:a16="http://schemas.microsoft.com/office/drawing/2014/main" id="{FCB8944D-5B00-40D2-BC22-9F90BBE616BD}"/>
               </a:ext>
             </a:extLst>
           </p:cNvPr>
@@ -10323,7 +10331,7 @@
           <p:cNvPr id="7" name="">
             <a:extLst xmlns:a="http://schemas.openxmlformats.org/drawingml/2006/main">
               <a:ext uri="{FF2B5EF4-FFF2-40B4-BE49-F238E27FC236}">
-                <a16:creationId xmlns:a16="http://schemas.microsoft.com/office/drawing/2014/main" id="{044A8627-944F-4620-B7CE-B0AFCA208E45}"/>
+                <a16:creationId xmlns:a16="http://schemas.microsoft.com/office/drawing/2014/main" id="{061B0788-FC77-4A44-A24D-4C1D77AC17CE}"/>
               </a:ext>
             </a:extLst>
           </p:cNvPr>
@@ -10355,7 +10363,7 @@
           <p:cNvPr id="8" name="">
             <a:extLst xmlns:a="http://schemas.openxmlformats.org/drawingml/2006/main">
               <a:ext uri="{FF2B5EF4-FFF2-40B4-BE49-F238E27FC236}">
-                <a16:creationId xmlns:a16="http://schemas.microsoft.com/office/drawing/2014/main" id="{06DB10BC-03BF-40DE-BA52-9FF57D1F6F90}"/>
+                <a16:creationId xmlns:a16="http://schemas.microsoft.com/office/drawing/2014/main" id="{A331BAC6-8CB6-45B9-BCB9-B780B1434C19}"/>
               </a:ext>
             </a:extLst>
           </p:cNvPr>
@@ -10412,7 +10420,7 @@
           <p:cNvPr id="9" name="">
             <a:extLst xmlns:a="http://schemas.openxmlformats.org/drawingml/2006/main">
               <a:ext uri="{FF2B5EF4-FFF2-40B4-BE49-F238E27FC236}">
-                <a16:creationId xmlns:a16="http://schemas.microsoft.com/office/drawing/2014/main" id="{394E7F2A-A841-4F31-A9FC-1DDE8E19657E}"/>
+                <a16:creationId xmlns:a16="http://schemas.microsoft.com/office/drawing/2014/main" id="{BFEA31CC-FDCA-417A-A946-EFED97436764}"/>
               </a:ext>
             </a:extLst>
           </p:cNvPr>
@@ -10469,7 +10477,7 @@
           <p:cNvPr id="10" name="">
             <a:extLst xmlns:a="http://schemas.openxmlformats.org/drawingml/2006/main">
               <a:ext uri="{FF2B5EF4-FFF2-40B4-BE49-F238E27FC236}">
-                <a16:creationId xmlns:a16="http://schemas.microsoft.com/office/drawing/2014/main" id="{DE8645FE-2CD1-4876-917A-C23FFAD898C0}"/>
+                <a16:creationId xmlns:a16="http://schemas.microsoft.com/office/drawing/2014/main" id="{54019FC0-6DF2-4F85-8C06-EFB14A58E0AC}"/>
               </a:ext>
             </a:extLst>
           </p:cNvPr>
@@ -10526,7 +10534,7 @@
           <p:cNvPr id="11" name="">
             <a:extLst xmlns:a="http://schemas.openxmlformats.org/drawingml/2006/main">
               <a:ext uri="{FF2B5EF4-FFF2-40B4-BE49-F238E27FC236}">
-                <a16:creationId xmlns:a16="http://schemas.microsoft.com/office/drawing/2014/main" id="{F9FF25C9-4A70-4B6A-B789-3CD26B5AED04}"/>
+                <a16:creationId xmlns:a16="http://schemas.microsoft.com/office/drawing/2014/main" id="{89F72B54-9E15-40DF-AE01-4AA2492F1E26}"/>
               </a:ext>
             </a:extLst>
           </p:cNvPr>
@@ -10583,7 +10591,7 @@
           <p:cNvPr id="12" name="">
             <a:extLst xmlns:a="http://schemas.openxmlformats.org/drawingml/2006/main">
               <a:ext uri="{FF2B5EF4-FFF2-40B4-BE49-F238E27FC236}">
-                <a16:creationId xmlns:a16="http://schemas.microsoft.com/office/drawing/2014/main" id="{D0520F2F-971A-4A29-A78F-916286E0A0B1}"/>
+                <a16:creationId xmlns:a16="http://schemas.microsoft.com/office/drawing/2014/main" id="{DA250ED6-5541-4065-8A69-899C34C363AA}"/>
               </a:ext>
             </a:extLst>
           </p:cNvPr>
@@ -10640,7 +10648,7 @@
           <p:cNvPr id="13" name="">
             <a:extLst xmlns:a="http://schemas.openxmlformats.org/drawingml/2006/main">
               <a:ext uri="{FF2B5EF4-FFF2-40B4-BE49-F238E27FC236}">
-                <a16:creationId xmlns:a16="http://schemas.microsoft.com/office/drawing/2014/main" id="{922EE62C-333C-4272-8A38-B84815EE3920}"/>
+                <a16:creationId xmlns:a16="http://schemas.microsoft.com/office/drawing/2014/main" id="{BE45DA98-DF53-4FFE-BF07-A341D9F075D0}"/>
               </a:ext>
             </a:extLst>
           </p:cNvPr>
@@ -10697,7 +10705,7 @@
           <p:cNvPr id="14" name="">
             <a:extLst xmlns:a="http://schemas.openxmlformats.org/drawingml/2006/main">
               <a:ext uri="{FF2B5EF4-FFF2-40B4-BE49-F238E27FC236}">
-                <a16:creationId xmlns:a16="http://schemas.microsoft.com/office/drawing/2014/main" id="{03F095B3-4EB8-41E7-96F7-08640A40E853}"/>
+                <a16:creationId xmlns:a16="http://schemas.microsoft.com/office/drawing/2014/main" id="{66A1DD46-9E60-43AB-96DE-B948A49DC22E}"/>
               </a:ext>
             </a:extLst>
           </p:cNvPr>
@@ -10754,7 +10762,7 @@
           <p:cNvPr id="15" name="">
             <a:extLst xmlns:a="http://schemas.openxmlformats.org/drawingml/2006/main">
               <a:ext uri="{FF2B5EF4-FFF2-40B4-BE49-F238E27FC236}">
-                <a16:creationId xmlns:a16="http://schemas.microsoft.com/office/drawing/2014/main" id="{3BCF646B-93AC-4D68-A156-F44A04176FE2}"/>
+                <a16:creationId xmlns:a16="http://schemas.microsoft.com/office/drawing/2014/main" id="{F0C449E4-5839-4378-8A4A-611C048A5C29}"/>
               </a:ext>
             </a:extLst>
           </p:cNvPr>
@@ -10809,7 +10817,7 @@
     </p:spTree>
     <p:extLst>
       <p:ext uri="{BB962C8B-B14F-4D97-AF65-F5344CB8AC3E}">
-        <p14:creationId xmlns:p14="http://schemas.microsoft.com/office/powerpoint/2010/main" val="36510424"/>
+        <p14:creationId xmlns:p14="http://schemas.microsoft.com/office/powerpoint/2010/main" val="1972164912"/>
       </p:ext>
     </p:extLst>
   </p:cSld>
@@ -10964,7 +10972,7 @@
           <p:cNvPr id="16" name="">
             <a:extLst xmlns:a="http://schemas.openxmlformats.org/drawingml/2006/main">
               <a:ext uri="{FF2B5EF4-FFF2-40B4-BE49-F238E27FC236}">
-                <a16:creationId xmlns:a16="http://schemas.microsoft.com/office/drawing/2014/main" id="{B3E023F1-9D56-44C9-8FB2-3CD2B40FA68E}"/>
+                <a16:creationId xmlns:a16="http://schemas.microsoft.com/office/drawing/2014/main" id="{A904342B-B219-464D-A118-FDAD4B2A8EBC}"/>
               </a:ext>
             </a:extLst>
           </p:cNvPr>
@@ -10996,7 +11004,7 @@
           <p:cNvPr id="2" name="">
             <a:extLst xmlns:a="http://schemas.openxmlformats.org/drawingml/2006/main">
               <a:ext uri="{FF2B5EF4-FFF2-40B4-BE49-F238E27FC236}">
-                <a16:creationId xmlns:a16="http://schemas.microsoft.com/office/drawing/2014/main" id="{45FB9245-C026-4537-94C4-A6AA8D19293A}"/>
+                <a16:creationId xmlns:a16="http://schemas.microsoft.com/office/drawing/2014/main" id="{A18FBD66-3944-471B-82D1-664F03193AE7}"/>
               </a:ext>
             </a:extLst>
           </p:cNvPr>
@@ -11053,7 +11061,7 @@
           <p:cNvPr id="3" name="">
             <a:extLst xmlns:a="http://schemas.openxmlformats.org/drawingml/2006/main">
               <a:ext uri="{FF2B5EF4-FFF2-40B4-BE49-F238E27FC236}">
-                <a16:creationId xmlns:a16="http://schemas.microsoft.com/office/drawing/2014/main" id="{2639CAD3-6376-416D-A310-633B73C2BAB5}"/>
+                <a16:creationId xmlns:a16="http://schemas.microsoft.com/office/drawing/2014/main" id="{DAA8B309-40B5-4236-95B2-DDB5C296CCAD}"/>
               </a:ext>
             </a:extLst>
           </p:cNvPr>
@@ -11085,7 +11093,7 @@
           <p:cNvPr id="4" name="">
             <a:extLst xmlns:a="http://schemas.openxmlformats.org/drawingml/2006/main">
               <a:ext uri="{FF2B5EF4-FFF2-40B4-BE49-F238E27FC236}">
-                <a16:creationId xmlns:a16="http://schemas.microsoft.com/office/drawing/2014/main" id="{E94B2DB8-AFBD-431E-892F-7BF46B4F7682}"/>
+                <a16:creationId xmlns:a16="http://schemas.microsoft.com/office/drawing/2014/main" id="{50BA5D78-F1F4-4162-A68F-EA891F8279DC}"/>
               </a:ext>
             </a:extLst>
           </p:cNvPr>
@@ -11142,7 +11150,7 @@
           <p:cNvPr id="5" name="">
             <a:extLst xmlns:a="http://schemas.openxmlformats.org/drawingml/2006/main">
               <a:ext uri="{FF2B5EF4-FFF2-40B4-BE49-F238E27FC236}">
-                <a16:creationId xmlns:a16="http://schemas.microsoft.com/office/drawing/2014/main" id="{CF447EFF-BDE7-4EB2-9106-C34BFE39B7CF}"/>
+                <a16:creationId xmlns:a16="http://schemas.microsoft.com/office/drawing/2014/main" id="{F605C35C-C7B1-42CE-AB65-1F4BF3181B7B}"/>
               </a:ext>
             </a:extLst>
           </p:cNvPr>
@@ -11199,7 +11207,7 @@
           <p:cNvPr id="6" name="">
             <a:extLst xmlns:a="http://schemas.openxmlformats.org/drawingml/2006/main">
               <a:ext uri="{FF2B5EF4-FFF2-40B4-BE49-F238E27FC236}">
-                <a16:creationId xmlns:a16="http://schemas.microsoft.com/office/drawing/2014/main" id="{23F4E75E-69CA-49D5-AA74-1794BAB109D1}"/>
+                <a16:creationId xmlns:a16="http://schemas.microsoft.com/office/drawing/2014/main" id="{FE644DB5-0E0E-4D81-965C-64FC5EBCA70D}"/>
               </a:ext>
             </a:extLst>
           </p:cNvPr>
@@ -11256,7 +11264,7 @@
           <p:cNvPr id="7" name="">
             <a:extLst xmlns:a="http://schemas.openxmlformats.org/drawingml/2006/main">
               <a:ext uri="{FF2B5EF4-FFF2-40B4-BE49-F238E27FC236}">
-                <a16:creationId xmlns:a16="http://schemas.microsoft.com/office/drawing/2014/main" id="{A2B7BBE4-A085-4768-828D-A00DEBF8529D}"/>
+                <a16:creationId xmlns:a16="http://schemas.microsoft.com/office/drawing/2014/main" id="{92A100CE-62E7-4841-AB9D-D62CCD146A46}"/>
               </a:ext>
             </a:extLst>
           </p:cNvPr>
@@ -11288,7 +11296,7 @@
           <p:cNvPr id="8" name="">
             <a:extLst xmlns:a="http://schemas.openxmlformats.org/drawingml/2006/main">
               <a:ext uri="{FF2B5EF4-FFF2-40B4-BE49-F238E27FC236}">
-                <a16:creationId xmlns:a16="http://schemas.microsoft.com/office/drawing/2014/main" id="{279AFB39-6AE3-496E-9D39-5E246FEC7A46}"/>
+                <a16:creationId xmlns:a16="http://schemas.microsoft.com/office/drawing/2014/main" id="{853FAE32-D9AF-4223-80A1-B4F50C037E14}"/>
               </a:ext>
             </a:extLst>
           </p:cNvPr>
@@ -11345,7 +11353,7 @@
           <p:cNvPr id="9" name="">
             <a:extLst xmlns:a="http://schemas.openxmlformats.org/drawingml/2006/main">
               <a:ext uri="{FF2B5EF4-FFF2-40B4-BE49-F238E27FC236}">
-                <a16:creationId xmlns:a16="http://schemas.microsoft.com/office/drawing/2014/main" id="{71D441E9-474F-4D47-8267-353AC9E7F84A}"/>
+                <a16:creationId xmlns:a16="http://schemas.microsoft.com/office/drawing/2014/main" id="{0963CD18-6558-407D-8E7F-735CBA9913BA}"/>
               </a:ext>
             </a:extLst>
           </p:cNvPr>
@@ -11406,7 +11414,7 @@
           <p:nvPr/>
         </p:nvPicPr>
         <p:blipFill>
-          <a:blip xmlns:r="http://schemas.openxmlformats.org/officeDocument/2006/relationships" xmlns:a="http://schemas.openxmlformats.org/drawingml/2006/main" r:embed="R2cbebc1adb4f4dcd"/>
+          <a:blip xmlns:r="http://schemas.openxmlformats.org/officeDocument/2006/relationships" xmlns:a="http://schemas.openxmlformats.org/drawingml/2006/main" r:embed="Rc13cbcddbc74477e"/>
           <a:stretch xmlns:a="http://schemas.openxmlformats.org/drawingml/2006/main"/>
         </p:blipFill>
         <p:spPr>
@@ -11424,7 +11432,7 @@
           <p:cNvPr id="11" name="">
             <a:extLst xmlns:a="http://schemas.openxmlformats.org/drawingml/2006/main">
               <a:ext uri="{FF2B5EF4-FFF2-40B4-BE49-F238E27FC236}">
-                <a16:creationId xmlns:a16="http://schemas.microsoft.com/office/drawing/2014/main" id="{74596F85-E050-4611-8809-79FAF45BA64F}"/>
+                <a16:creationId xmlns:a16="http://schemas.microsoft.com/office/drawing/2014/main" id="{06016A78-C167-4928-A514-16831BC7D0E9}"/>
               </a:ext>
             </a:extLst>
           </p:cNvPr>
@@ -11481,7 +11489,7 @@
           <p:cNvPr id="12" name="">
             <a:extLst xmlns:a="http://schemas.openxmlformats.org/drawingml/2006/main">
               <a:ext uri="{FF2B5EF4-FFF2-40B4-BE49-F238E27FC236}">
-                <a16:creationId xmlns:a16="http://schemas.microsoft.com/office/drawing/2014/main" id="{8572D723-9DD6-44AB-BA7F-CB6D821E0EA7}"/>
+                <a16:creationId xmlns:a16="http://schemas.microsoft.com/office/drawing/2014/main" id="{ED7C070A-DB91-4011-AD6A-8E74994E8A32}"/>
               </a:ext>
             </a:extLst>
           </p:cNvPr>
@@ -11538,7 +11546,7 @@
           <p:cNvPr id="13" name="">
             <a:extLst xmlns:a="http://schemas.openxmlformats.org/drawingml/2006/main">
               <a:ext uri="{FF2B5EF4-FFF2-40B4-BE49-F238E27FC236}">
-                <a16:creationId xmlns:a16="http://schemas.microsoft.com/office/drawing/2014/main" id="{2AF06EBB-CACB-4E68-AAEF-5D39DBFE181E}"/>
+                <a16:creationId xmlns:a16="http://schemas.microsoft.com/office/drawing/2014/main" id="{110FEB35-452B-431C-A9A0-4085F70A189E}"/>
               </a:ext>
             </a:extLst>
           </p:cNvPr>
@@ -11570,7 +11578,7 @@
           <p:cNvPr id="14" name="">
             <a:extLst xmlns:a="http://schemas.openxmlformats.org/drawingml/2006/main">
               <a:ext uri="{FF2B5EF4-FFF2-40B4-BE49-F238E27FC236}">
-                <a16:creationId xmlns:a16="http://schemas.microsoft.com/office/drawing/2014/main" id="{7A8EE617-AD49-4B62-8839-84DCF486CBDE}"/>
+                <a16:creationId xmlns:a16="http://schemas.microsoft.com/office/drawing/2014/main" id="{830C215C-DB3D-49ED-AB4E-130094ADD670}"/>
               </a:ext>
             </a:extLst>
           </p:cNvPr>
@@ -11627,7 +11635,7 @@
           <p:cNvPr id="15" name="">
             <a:extLst xmlns:a="http://schemas.openxmlformats.org/drawingml/2006/main">
               <a:ext uri="{FF2B5EF4-FFF2-40B4-BE49-F238E27FC236}">
-                <a16:creationId xmlns:a16="http://schemas.microsoft.com/office/drawing/2014/main" id="{1C21EC4E-3425-4E96-8217-AE57898FA179}"/>
+                <a16:creationId xmlns:a16="http://schemas.microsoft.com/office/drawing/2014/main" id="{20A59104-8E20-4730-8A6F-625D6EB369CA}"/>
               </a:ext>
             </a:extLst>
           </p:cNvPr>
@@ -11682,7 +11690,7 @@
     </p:spTree>
     <p:extLst>
       <p:ext uri="{BB962C8B-B14F-4D97-AF65-F5344CB8AC3E}">
-        <p14:creationId xmlns:p14="http://schemas.microsoft.com/office/powerpoint/2010/main" val="1396760993"/>
+        <p14:creationId xmlns:p14="http://schemas.microsoft.com/office/powerpoint/2010/main" val="1578332911"/>
       </p:ext>
     </p:extLst>
   </p:cSld>
@@ -11837,7 +11845,7 @@
           <p:cNvPr id="23" name="">
             <a:extLst xmlns:a="http://schemas.openxmlformats.org/drawingml/2006/main">
               <a:ext uri="{FF2B5EF4-FFF2-40B4-BE49-F238E27FC236}">
-                <a16:creationId xmlns:a16="http://schemas.microsoft.com/office/drawing/2014/main" id="{2ED0168A-1040-440F-8112-98597CE1C974}"/>
+                <a16:creationId xmlns:a16="http://schemas.microsoft.com/office/drawing/2014/main" id="{A1D4749A-0D78-46DF-A4D9-4243B29A8591}"/>
               </a:ext>
             </a:extLst>
           </p:cNvPr>
@@ -11869,7 +11877,7 @@
           <p:cNvPr id="2" name="">
             <a:extLst xmlns:a="http://schemas.openxmlformats.org/drawingml/2006/main">
               <a:ext uri="{FF2B5EF4-FFF2-40B4-BE49-F238E27FC236}">
-                <a16:creationId xmlns:a16="http://schemas.microsoft.com/office/drawing/2014/main" id="{C4FF34F4-C00B-45C2-A17E-5FF98027296D}"/>
+                <a16:creationId xmlns:a16="http://schemas.microsoft.com/office/drawing/2014/main" id="{EBD6D8D7-3150-4BBC-949E-051E4A58CD64}"/>
               </a:ext>
             </a:extLst>
           </p:cNvPr>
@@ -11926,7 +11934,7 @@
           <p:cNvPr id="3" name="">
             <a:extLst xmlns:a="http://schemas.openxmlformats.org/drawingml/2006/main">
               <a:ext uri="{FF2B5EF4-FFF2-40B4-BE49-F238E27FC236}">
-                <a16:creationId xmlns:a16="http://schemas.microsoft.com/office/drawing/2014/main" id="{3D00BEA3-E15A-42F0-8E8C-58816C719E81}"/>
+                <a16:creationId xmlns:a16="http://schemas.microsoft.com/office/drawing/2014/main" id="{E5F3270F-5639-44E4-B29F-733CB1CBC3B5}"/>
               </a:ext>
             </a:extLst>
           </p:cNvPr>
@@ -11958,7 +11966,7 @@
           <p:cNvPr id="4" name="">
             <a:extLst xmlns:a="http://schemas.openxmlformats.org/drawingml/2006/main">
               <a:ext uri="{FF2B5EF4-FFF2-40B4-BE49-F238E27FC236}">
-                <a16:creationId xmlns:a16="http://schemas.microsoft.com/office/drawing/2014/main" id="{92E4FFE5-1B00-4A8B-83BA-9CD32172A1E1}"/>
+                <a16:creationId xmlns:a16="http://schemas.microsoft.com/office/drawing/2014/main" id="{84CDBF7F-38A0-45BB-86A8-B573AC8CF32B}"/>
               </a:ext>
             </a:extLst>
           </p:cNvPr>
@@ -12015,7 +12023,7 @@
           <p:cNvPr id="5" name="">
             <a:extLst xmlns:a="http://schemas.openxmlformats.org/drawingml/2006/main">
               <a:ext uri="{FF2B5EF4-FFF2-40B4-BE49-F238E27FC236}">
-                <a16:creationId xmlns:a16="http://schemas.microsoft.com/office/drawing/2014/main" id="{C906943A-3A0A-4FBE-9428-2BDA4A47F218}"/>
+                <a16:creationId xmlns:a16="http://schemas.microsoft.com/office/drawing/2014/main" id="{DB74E04D-F346-4B0A-A107-47E7BAF931B2}"/>
               </a:ext>
             </a:extLst>
           </p:cNvPr>
@@ -12072,7 +12080,7 @@
           <p:cNvPr id="6" name="">
             <a:extLst xmlns:a="http://schemas.openxmlformats.org/drawingml/2006/main">
               <a:ext uri="{FF2B5EF4-FFF2-40B4-BE49-F238E27FC236}">
-                <a16:creationId xmlns:a16="http://schemas.microsoft.com/office/drawing/2014/main" id="{7E108922-F9DF-47B4-853B-8E22EF4C3431}"/>
+                <a16:creationId xmlns:a16="http://schemas.microsoft.com/office/drawing/2014/main" id="{A99B199F-93F8-4D9D-8C09-C7FA726C9A4A}"/>
               </a:ext>
             </a:extLst>
           </p:cNvPr>
@@ -12129,7 +12137,7 @@
           <p:cNvPr id="7" name="">
             <a:extLst xmlns:a="http://schemas.openxmlformats.org/drawingml/2006/main">
               <a:ext uri="{FF2B5EF4-FFF2-40B4-BE49-F238E27FC236}">
-                <a16:creationId xmlns:a16="http://schemas.microsoft.com/office/drawing/2014/main" id="{C834CD50-A64C-4E69-8DCE-35EB9B12B7C1}"/>
+                <a16:creationId xmlns:a16="http://schemas.microsoft.com/office/drawing/2014/main" id="{788A7F24-0C40-415C-8D17-3F7F71FF1728}"/>
               </a:ext>
             </a:extLst>
           </p:cNvPr>
@@ -12161,7 +12169,7 @@
           <p:cNvPr id="8" name="">
             <a:extLst xmlns:a="http://schemas.openxmlformats.org/drawingml/2006/main">
               <a:ext uri="{FF2B5EF4-FFF2-40B4-BE49-F238E27FC236}">
-                <a16:creationId xmlns:a16="http://schemas.microsoft.com/office/drawing/2014/main" id="{4A676BAC-4919-4F54-8B0E-7D86896E216D}"/>
+                <a16:creationId xmlns:a16="http://schemas.microsoft.com/office/drawing/2014/main" id="{CAA9D98F-A93B-4725-ABF1-C2F2883156E4}"/>
               </a:ext>
             </a:extLst>
           </p:cNvPr>
@@ -12218,7 +12226,7 @@
           <p:cNvPr id="9" name="">
             <a:extLst xmlns:a="http://schemas.openxmlformats.org/drawingml/2006/main">
               <a:ext uri="{FF2B5EF4-FFF2-40B4-BE49-F238E27FC236}">
-                <a16:creationId xmlns:a16="http://schemas.microsoft.com/office/drawing/2014/main" id="{DD50D139-0370-4B86-BD4C-35E33174595B}"/>
+                <a16:creationId xmlns:a16="http://schemas.microsoft.com/office/drawing/2014/main" id="{D40CFED1-413D-4C11-80EE-8CC370AFC758}"/>
               </a:ext>
             </a:extLst>
           </p:cNvPr>
@@ -12275,7 +12283,7 @@
           <p:cNvPr id="10" name="">
             <a:extLst xmlns:a="http://schemas.openxmlformats.org/drawingml/2006/main">
               <a:ext uri="{FF2B5EF4-FFF2-40B4-BE49-F238E27FC236}">
-                <a16:creationId xmlns:a16="http://schemas.microsoft.com/office/drawing/2014/main" id="{BE42933C-648F-464D-8BA1-D88745C881BE}"/>
+                <a16:creationId xmlns:a16="http://schemas.microsoft.com/office/drawing/2014/main" id="{C55F3DB2-3003-40EF-BC36-E39151CD1B65}"/>
               </a:ext>
             </a:extLst>
           </p:cNvPr>
@@ -12309,7 +12317,7 @@
           <p:cNvPr id="11" name="">
             <a:extLst xmlns:a="http://schemas.openxmlformats.org/drawingml/2006/main">
               <a:ext uri="{FF2B5EF4-FFF2-40B4-BE49-F238E27FC236}">
-                <a16:creationId xmlns:a16="http://schemas.microsoft.com/office/drawing/2014/main" id="{F91EB28D-619F-4ECF-B5AA-6D8FE7964F55}"/>
+                <a16:creationId xmlns:a16="http://schemas.microsoft.com/office/drawing/2014/main" id="{A386F082-F9EA-4089-9044-D3B3649DE676}"/>
               </a:ext>
             </a:extLst>
           </p:cNvPr>
@@ -12341,7 +12349,7 @@
           <p:cNvPr id="12" name="">
             <a:extLst xmlns:a="http://schemas.openxmlformats.org/drawingml/2006/main">
               <a:ext uri="{FF2B5EF4-FFF2-40B4-BE49-F238E27FC236}">
-                <a16:creationId xmlns:a16="http://schemas.microsoft.com/office/drawing/2014/main" id="{13D155CC-5679-4E23-803C-D068DE724E23}"/>
+                <a16:creationId xmlns:a16="http://schemas.microsoft.com/office/drawing/2014/main" id="{AE5E68E6-1C2A-4B5E-A419-97986DCE69A2}"/>
               </a:ext>
             </a:extLst>
           </p:cNvPr>
@@ -12398,7 +12406,7 @@
           <p:cNvPr id="13" name="">
             <a:extLst xmlns:a="http://schemas.openxmlformats.org/drawingml/2006/main">
               <a:ext uri="{FF2B5EF4-FFF2-40B4-BE49-F238E27FC236}">
-                <a16:creationId xmlns:a16="http://schemas.microsoft.com/office/drawing/2014/main" id="{F2A3A9B1-C68A-414A-845A-0C1DB6E527C5}"/>
+                <a16:creationId xmlns:a16="http://schemas.microsoft.com/office/drawing/2014/main" id="{99457B32-5FCA-4DC8-A212-14CFE7C5D99B}"/>
               </a:ext>
             </a:extLst>
           </p:cNvPr>
@@ -12455,7 +12463,7 @@
           <p:cNvPr id="14" name="">
             <a:extLst xmlns:a="http://schemas.openxmlformats.org/drawingml/2006/main">
               <a:ext uri="{FF2B5EF4-FFF2-40B4-BE49-F238E27FC236}">
-                <a16:creationId xmlns:a16="http://schemas.microsoft.com/office/drawing/2014/main" id="{AD24A5CA-D416-4E88-BF31-C6F83BFDAF16}"/>
+                <a16:creationId xmlns:a16="http://schemas.microsoft.com/office/drawing/2014/main" id="{26865F38-0B79-4BC2-B99D-6AF934471B2A}"/>
               </a:ext>
             </a:extLst>
           </p:cNvPr>
@@ -12489,7 +12497,7 @@
           <p:cNvPr id="15" name="">
             <a:extLst xmlns:a="http://schemas.openxmlformats.org/drawingml/2006/main">
               <a:ext uri="{FF2B5EF4-FFF2-40B4-BE49-F238E27FC236}">
-                <a16:creationId xmlns:a16="http://schemas.microsoft.com/office/drawing/2014/main" id="{74057FC1-F44F-49C4-B34D-7BA0DAFAF222}"/>
+                <a16:creationId xmlns:a16="http://schemas.microsoft.com/office/drawing/2014/main" id="{6631C88D-1A4B-4330-A684-E738EBC213A0}"/>
               </a:ext>
             </a:extLst>
           </p:cNvPr>
@@ -12521,7 +12529,7 @@
           <p:cNvPr id="16" name="">
             <a:extLst xmlns:a="http://schemas.openxmlformats.org/drawingml/2006/main">
               <a:ext uri="{FF2B5EF4-FFF2-40B4-BE49-F238E27FC236}">
-                <a16:creationId xmlns:a16="http://schemas.microsoft.com/office/drawing/2014/main" id="{1E6C82DB-D13D-4170-AFEB-5AAF170C1AD5}"/>
+                <a16:creationId xmlns:a16="http://schemas.microsoft.com/office/drawing/2014/main" id="{3638E071-D786-47E5-9DE2-A2044FEDA342}"/>
               </a:ext>
             </a:extLst>
           </p:cNvPr>
@@ -12578,7 +12586,7 @@
           <p:cNvPr id="17" name="">
             <a:extLst xmlns:a="http://schemas.openxmlformats.org/drawingml/2006/main">
               <a:ext uri="{FF2B5EF4-FFF2-40B4-BE49-F238E27FC236}">
-                <a16:creationId xmlns:a16="http://schemas.microsoft.com/office/drawing/2014/main" id="{7C0CFE94-481B-4657-8D69-1DB7D9A04FDF}"/>
+                <a16:creationId xmlns:a16="http://schemas.microsoft.com/office/drawing/2014/main" id="{3D601A97-2CF7-423F-9870-6FB78BE50142}"/>
               </a:ext>
             </a:extLst>
           </p:cNvPr>
@@ -12635,7 +12643,7 @@
           <p:cNvPr id="18" name="">
             <a:extLst xmlns:a="http://schemas.openxmlformats.org/drawingml/2006/main">
               <a:ext uri="{FF2B5EF4-FFF2-40B4-BE49-F238E27FC236}">
-                <a16:creationId xmlns:a16="http://schemas.microsoft.com/office/drawing/2014/main" id="{58988E24-EC25-4356-9F3C-1586709E82C9}"/>
+                <a16:creationId xmlns:a16="http://schemas.microsoft.com/office/drawing/2014/main" id="{F2FC913A-4721-47CA-BC4E-83D1811716C1}"/>
               </a:ext>
             </a:extLst>
           </p:cNvPr>
@@ -12669,7 +12677,7 @@
           <p:cNvPr id="19" name="">
             <a:extLst xmlns:a="http://schemas.openxmlformats.org/drawingml/2006/main">
               <a:ext uri="{FF2B5EF4-FFF2-40B4-BE49-F238E27FC236}">
-                <a16:creationId xmlns:a16="http://schemas.microsoft.com/office/drawing/2014/main" id="{0BE421CF-FC87-4263-B758-436E452B08CB}"/>
+                <a16:creationId xmlns:a16="http://schemas.microsoft.com/office/drawing/2014/main" id="{8D6DBFC2-F361-45F0-96D4-9B655F1B659B}"/>
               </a:ext>
             </a:extLst>
           </p:cNvPr>
@@ -12701,7 +12709,7 @@
           <p:cNvPr id="20" name="">
             <a:extLst xmlns:a="http://schemas.openxmlformats.org/drawingml/2006/main">
               <a:ext uri="{FF2B5EF4-FFF2-40B4-BE49-F238E27FC236}">
-                <a16:creationId xmlns:a16="http://schemas.microsoft.com/office/drawing/2014/main" id="{74F44E4B-F515-40EC-86DC-AF4A4CD500A3}"/>
+                <a16:creationId xmlns:a16="http://schemas.microsoft.com/office/drawing/2014/main" id="{C35650DB-A77F-4305-8735-21CBE8A7B10A}"/>
               </a:ext>
             </a:extLst>
           </p:cNvPr>
@@ -12758,7 +12766,7 @@
           <p:cNvPr id="21" name="">
             <a:extLst xmlns:a="http://schemas.openxmlformats.org/drawingml/2006/main">
               <a:ext uri="{FF2B5EF4-FFF2-40B4-BE49-F238E27FC236}">
-                <a16:creationId xmlns:a16="http://schemas.microsoft.com/office/drawing/2014/main" id="{4E795330-1B6C-453A-9674-9158273B1F39}"/>
+                <a16:creationId xmlns:a16="http://schemas.microsoft.com/office/drawing/2014/main" id="{955C5519-2F14-442D-A052-31201C0A62F7}"/>
               </a:ext>
             </a:extLst>
           </p:cNvPr>
@@ -12815,7 +12823,7 @@
           <p:cNvPr id="22" name="">
             <a:extLst xmlns:a="http://schemas.openxmlformats.org/drawingml/2006/main">
               <a:ext uri="{FF2B5EF4-FFF2-40B4-BE49-F238E27FC236}">
-                <a16:creationId xmlns:a16="http://schemas.microsoft.com/office/drawing/2014/main" id="{E1C50113-53B3-4EE5-80F4-BFB5476A69CD}"/>
+                <a16:creationId xmlns:a16="http://schemas.microsoft.com/office/drawing/2014/main" id="{7A8110C8-46B3-48B3-8F5D-FC6FF5C1DF92}"/>
               </a:ext>
             </a:extLst>
           </p:cNvPr>
@@ -12870,7 +12878,7 @@
     </p:spTree>
     <p:extLst>
       <p:ext uri="{BB962C8B-B14F-4D97-AF65-F5344CB8AC3E}">
-        <p14:creationId xmlns:p14="http://schemas.microsoft.com/office/powerpoint/2010/main" val="319182724"/>
+        <p14:creationId xmlns:p14="http://schemas.microsoft.com/office/powerpoint/2010/main" val="627514397"/>
       </p:ext>
     </p:extLst>
   </p:cSld>
@@ -13071,7 +13079,7 @@
           <p:cNvPr id="22" name="">
             <a:extLst xmlns:a="http://schemas.openxmlformats.org/drawingml/2006/main">
               <a:ext uri="{FF2B5EF4-FFF2-40B4-BE49-F238E27FC236}">
-                <a16:creationId xmlns:a16="http://schemas.microsoft.com/office/drawing/2014/main" id="{177D24EA-EB4F-41B7-94D9-253C0B360476}"/>
+                <a16:creationId xmlns:a16="http://schemas.microsoft.com/office/drawing/2014/main" id="{D6F531DF-BF40-4C31-A094-7DFB534851C9}"/>
               </a:ext>
             </a:extLst>
           </p:cNvPr>
@@ -13103,7 +13111,7 @@
           <p:cNvPr id="2" name="">
             <a:extLst xmlns:a="http://schemas.openxmlformats.org/drawingml/2006/main">
               <a:ext uri="{FF2B5EF4-FFF2-40B4-BE49-F238E27FC236}">
-                <a16:creationId xmlns:a16="http://schemas.microsoft.com/office/drawing/2014/main" id="{57EAEE7A-F502-436D-A3D1-CE0A02091EFB}"/>
+                <a16:creationId xmlns:a16="http://schemas.microsoft.com/office/drawing/2014/main" id="{C923F060-0022-474C-BA50-727A237A1ED1}"/>
               </a:ext>
             </a:extLst>
           </p:cNvPr>
@@ -13160,7 +13168,7 @@
           <p:cNvPr id="3" name="">
             <a:extLst xmlns:a="http://schemas.openxmlformats.org/drawingml/2006/main">
               <a:ext uri="{FF2B5EF4-FFF2-40B4-BE49-F238E27FC236}">
-                <a16:creationId xmlns:a16="http://schemas.microsoft.com/office/drawing/2014/main" id="{DAF89B89-46FA-430E-B654-ADC501ED4219}"/>
+                <a16:creationId xmlns:a16="http://schemas.microsoft.com/office/drawing/2014/main" id="{1E0FCA08-1637-4266-A459-B3BD1AFF31D0}"/>
               </a:ext>
             </a:extLst>
           </p:cNvPr>
@@ -13192,7 +13200,7 @@
           <p:cNvPr id="4" name="">
             <a:extLst xmlns:a="http://schemas.openxmlformats.org/drawingml/2006/main">
               <a:ext uri="{FF2B5EF4-FFF2-40B4-BE49-F238E27FC236}">
-                <a16:creationId xmlns:a16="http://schemas.microsoft.com/office/drawing/2014/main" id="{A78CB752-080C-4EB6-9FAF-D2DB1B9C4740}"/>
+                <a16:creationId xmlns:a16="http://schemas.microsoft.com/office/drawing/2014/main" id="{AE1F6415-5D70-4236-BB41-5768D8037D15}"/>
               </a:ext>
             </a:extLst>
           </p:cNvPr>
@@ -13249,7 +13257,7 @@
           <p:cNvPr id="5" name="">
             <a:extLst xmlns:a="http://schemas.openxmlformats.org/drawingml/2006/main">
               <a:ext uri="{FF2B5EF4-FFF2-40B4-BE49-F238E27FC236}">
-                <a16:creationId xmlns:a16="http://schemas.microsoft.com/office/drawing/2014/main" id="{070990BC-D601-424B-9514-54D1F036688A}"/>
+                <a16:creationId xmlns:a16="http://schemas.microsoft.com/office/drawing/2014/main" id="{B6C56F29-9914-4248-B834-C4AA58D8CF13}"/>
               </a:ext>
             </a:extLst>
           </p:cNvPr>
@@ -13306,7 +13314,7 @@
           <p:cNvPr id="6" name="">
             <a:extLst xmlns:a="http://schemas.openxmlformats.org/drawingml/2006/main">
               <a:ext uri="{FF2B5EF4-FFF2-40B4-BE49-F238E27FC236}">
-                <a16:creationId xmlns:a16="http://schemas.microsoft.com/office/drawing/2014/main" id="{9FC9E9D9-FE39-4704-A002-6C8B11070AD0}"/>
+                <a16:creationId xmlns:a16="http://schemas.microsoft.com/office/drawing/2014/main" id="{E0340CF8-3DC9-4CBF-8FCF-6A1091DA74C7}"/>
               </a:ext>
             </a:extLst>
           </p:cNvPr>
@@ -13363,7 +13371,7 @@
           <p:cNvPr id="7" name="">
             <a:extLst xmlns:a="http://schemas.openxmlformats.org/drawingml/2006/main">
               <a:ext uri="{FF2B5EF4-FFF2-40B4-BE49-F238E27FC236}">
-                <a16:creationId xmlns:a16="http://schemas.microsoft.com/office/drawing/2014/main" id="{B72714E1-8310-4887-9EDB-0C7FA5953BFC}"/>
+                <a16:creationId xmlns:a16="http://schemas.microsoft.com/office/drawing/2014/main" id="{262098FF-24B4-44A9-B730-3A6480F875B2}"/>
               </a:ext>
             </a:extLst>
           </p:cNvPr>
@@ -13395,7 +13403,7 @@
           <p:cNvPr id="8" name="">
             <a:extLst xmlns:a="http://schemas.openxmlformats.org/drawingml/2006/main">
               <a:ext uri="{FF2B5EF4-FFF2-40B4-BE49-F238E27FC236}">
-                <a16:creationId xmlns:a16="http://schemas.microsoft.com/office/drawing/2014/main" id="{EE5E150D-2762-479D-B276-E8D5F5715D64}"/>
+                <a16:creationId xmlns:a16="http://schemas.microsoft.com/office/drawing/2014/main" id="{B4C97BE3-07CA-4325-BB21-896A73B8E388}"/>
               </a:ext>
             </a:extLst>
           </p:cNvPr>
@@ -13452,7 +13460,7 @@
           <p:cNvPr id="9" name="">
             <a:extLst xmlns:a="http://schemas.openxmlformats.org/drawingml/2006/main">
               <a:ext uri="{FF2B5EF4-FFF2-40B4-BE49-F238E27FC236}">
-                <a16:creationId xmlns:a16="http://schemas.microsoft.com/office/drawing/2014/main" id="{69960A0E-D64B-43A8-BC2E-D1FB1FF44403}"/>
+                <a16:creationId xmlns:a16="http://schemas.microsoft.com/office/drawing/2014/main" id="{2FF65D7D-788B-48B9-9263-4022B5CF7752}"/>
               </a:ext>
             </a:extLst>
           </p:cNvPr>
@@ -13509,7 +13517,7 @@
           <p:cNvPr id="10" name="">
             <a:extLst xmlns:a="http://schemas.openxmlformats.org/drawingml/2006/main">
               <a:ext uri="{FF2B5EF4-FFF2-40B4-BE49-F238E27FC236}">
-                <a16:creationId xmlns:a16="http://schemas.microsoft.com/office/drawing/2014/main" id="{CE4C989B-3B60-470A-A6A4-769E508BD34A}"/>
+                <a16:creationId xmlns:a16="http://schemas.microsoft.com/office/drawing/2014/main" id="{000A47DF-7A00-4C76-A006-C8649EE4C76F}"/>
               </a:ext>
             </a:extLst>
           </p:cNvPr>
@@ -13543,7 +13551,7 @@
           <p:cNvPr id="11" name="">
             <a:extLst xmlns:a="http://schemas.openxmlformats.org/drawingml/2006/main">
               <a:ext uri="{FF2B5EF4-FFF2-40B4-BE49-F238E27FC236}">
-                <a16:creationId xmlns:a16="http://schemas.microsoft.com/office/drawing/2014/main" id="{A5D8B517-FAF3-4272-BC76-4DD8D2601D20}"/>
+                <a16:creationId xmlns:a16="http://schemas.microsoft.com/office/drawing/2014/main" id="{A069C9D7-D948-46EF-95FF-651F62FA81A6}"/>
               </a:ext>
             </a:extLst>
           </p:cNvPr>
@@ -13575,7 +13583,7 @@
           <p:cNvPr id="12" name="">
             <a:extLst xmlns:a="http://schemas.openxmlformats.org/drawingml/2006/main">
               <a:ext uri="{FF2B5EF4-FFF2-40B4-BE49-F238E27FC236}">
-                <a16:creationId xmlns:a16="http://schemas.microsoft.com/office/drawing/2014/main" id="{8E7A0FA4-8A36-48CC-AA37-8D3CED78C14D}"/>
+                <a16:creationId xmlns:a16="http://schemas.microsoft.com/office/drawing/2014/main" id="{9781BCDF-A4BD-4CD0-BAFE-6268E11FAF20}"/>
               </a:ext>
             </a:extLst>
           </p:cNvPr>
@@ -13632,7 +13640,7 @@
           <p:cNvPr id="13" name="">
             <a:extLst xmlns:a="http://schemas.openxmlformats.org/drawingml/2006/main">
               <a:ext uri="{FF2B5EF4-FFF2-40B4-BE49-F238E27FC236}">
-                <a16:creationId xmlns:a16="http://schemas.microsoft.com/office/drawing/2014/main" id="{319F927D-8B5E-4B89-A566-64B17513B337}"/>
+                <a16:creationId xmlns:a16="http://schemas.microsoft.com/office/drawing/2014/main" id="{A01CA04E-12F2-4F35-BAFD-D74D3279EE0B}"/>
               </a:ext>
             </a:extLst>
           </p:cNvPr>
@@ -13689,7 +13697,7 @@
           <p:cNvPr id="14" name="">
             <a:extLst xmlns:a="http://schemas.openxmlformats.org/drawingml/2006/main">
               <a:ext uri="{FF2B5EF4-FFF2-40B4-BE49-F238E27FC236}">
-                <a16:creationId xmlns:a16="http://schemas.microsoft.com/office/drawing/2014/main" id="{A88765B4-5C56-4D83-AA48-A8082B31A4DB}"/>
+                <a16:creationId xmlns:a16="http://schemas.microsoft.com/office/drawing/2014/main" id="{88EB4EF7-0AC5-45BA-AE0B-A46329CFF6FD}"/>
               </a:ext>
             </a:extLst>
           </p:cNvPr>
@@ -13723,7 +13731,7 @@
           <p:cNvPr id="15" name="">
             <a:extLst xmlns:a="http://schemas.openxmlformats.org/drawingml/2006/main">
               <a:ext uri="{FF2B5EF4-FFF2-40B4-BE49-F238E27FC236}">
-                <a16:creationId xmlns:a16="http://schemas.microsoft.com/office/drawing/2014/main" id="{54565639-7A68-4BD7-97BC-7AEFD8668121}"/>
+                <a16:creationId xmlns:a16="http://schemas.microsoft.com/office/drawing/2014/main" id="{026C423F-56E8-49A5-9EA3-462131D058F9}"/>
               </a:ext>
             </a:extLst>
           </p:cNvPr>
@@ -13755,7 +13763,7 @@
           <p:cNvPr id="16" name="">
             <a:extLst xmlns:a="http://schemas.openxmlformats.org/drawingml/2006/main">
               <a:ext uri="{FF2B5EF4-FFF2-40B4-BE49-F238E27FC236}">
-                <a16:creationId xmlns:a16="http://schemas.microsoft.com/office/drawing/2014/main" id="{02A712B0-EAF4-4017-A4B0-9BCD9BC4DBB3}"/>
+                <a16:creationId xmlns:a16="http://schemas.microsoft.com/office/drawing/2014/main" id="{06A99986-DC11-480E-999B-088692AEA46A}"/>
               </a:ext>
             </a:extLst>
           </p:cNvPr>
@@ -13812,7 +13820,7 @@
           <p:cNvPr id="17" name="">
             <a:extLst xmlns:a="http://schemas.openxmlformats.org/drawingml/2006/main">
               <a:ext uri="{FF2B5EF4-FFF2-40B4-BE49-F238E27FC236}">
-                <a16:creationId xmlns:a16="http://schemas.microsoft.com/office/drawing/2014/main" id="{47B2BFA3-0C98-45B7-AE06-44CEFFC45675}"/>
+                <a16:creationId xmlns:a16="http://schemas.microsoft.com/office/drawing/2014/main" id="{F0F8A086-DE42-4308-A49C-EBF2E1E16180}"/>
               </a:ext>
             </a:extLst>
           </p:cNvPr>
@@ -13869,7 +13877,7 @@
           <p:cNvPr id="18" name="">
             <a:extLst xmlns:a="http://schemas.openxmlformats.org/drawingml/2006/main">
               <a:ext uri="{FF2B5EF4-FFF2-40B4-BE49-F238E27FC236}">
-                <a16:creationId xmlns:a16="http://schemas.microsoft.com/office/drawing/2014/main" id="{0809CC8E-799E-465A-B52E-537F405006E6}"/>
+                <a16:creationId xmlns:a16="http://schemas.microsoft.com/office/drawing/2014/main" id="{CC56C018-08F3-479D-90F9-DAB87071A69B}"/>
               </a:ext>
             </a:extLst>
           </p:cNvPr>
@@ -13903,7 +13911,7 @@
           <p:cNvPr id="19" name="">
             <a:extLst xmlns:a="http://schemas.openxmlformats.org/drawingml/2006/main">
               <a:ext uri="{FF2B5EF4-FFF2-40B4-BE49-F238E27FC236}">
-                <a16:creationId xmlns:a16="http://schemas.microsoft.com/office/drawing/2014/main" id="{AAC84E32-A1B9-44EE-92B3-636A19BACB5B}"/>
+                <a16:creationId xmlns:a16="http://schemas.microsoft.com/office/drawing/2014/main" id="{A2844B06-4658-47FC-9710-692A4A9BBEB6}"/>
               </a:ext>
             </a:extLst>
           </p:cNvPr>
@@ -13935,7 +13943,7 @@
           <p:cNvPr id="20" name="">
             <a:extLst xmlns:a="http://schemas.openxmlformats.org/drawingml/2006/main">
               <a:ext uri="{FF2B5EF4-FFF2-40B4-BE49-F238E27FC236}">
-                <a16:creationId xmlns:a16="http://schemas.microsoft.com/office/drawing/2014/main" id="{BC65128F-A990-4555-BEEF-886FC3C8D09E}"/>
+                <a16:creationId xmlns:a16="http://schemas.microsoft.com/office/drawing/2014/main" id="{DE2C0A8A-9906-4FBA-9E6B-63AF3A40020A}"/>
               </a:ext>
             </a:extLst>
           </p:cNvPr>
@@ -13992,7 +14000,7 @@
           <p:cNvPr id="21" name="">
             <a:extLst xmlns:a="http://schemas.openxmlformats.org/drawingml/2006/main">
               <a:ext uri="{FF2B5EF4-FFF2-40B4-BE49-F238E27FC236}">
-                <a16:creationId xmlns:a16="http://schemas.microsoft.com/office/drawing/2014/main" id="{B8698AE0-669A-47ED-B7F8-86B7C9427A8C}"/>
+                <a16:creationId xmlns:a16="http://schemas.microsoft.com/office/drawing/2014/main" id="{B26A2A42-13DC-495C-9CC4-9D77E305D57A}"/>
               </a:ext>
             </a:extLst>
           </p:cNvPr>
@@ -14047,7 +14055,7 @@
     </p:spTree>
     <p:extLst>
       <p:ext uri="{BB962C8B-B14F-4D97-AF65-F5344CB8AC3E}">
-        <p14:creationId xmlns:p14="http://schemas.microsoft.com/office/powerpoint/2010/main" val="549538240"/>
+        <p14:creationId xmlns:p14="http://schemas.microsoft.com/office/powerpoint/2010/main" val="732655521"/>
       </p:ext>
     </p:extLst>
   </p:cSld>
